--- a/public/fun/pack/pptx/birthday/돌잔치_12_돌잡이중심_아카시아길.pptx
+++ b/public/fun/pack/pptx/birthday/돌잔치_12_돌잡이중심_아카시아길.pptx
@@ -3347,7 +3347,7 @@
             <a:r>
               <a:rPr sz="4000" b="1" i="0">
                 <a:solidFill>
-                  <a:srgbClr val="49562E"/>
+                  <a:srgbClr val="526728"/>
                 </a:solidFill>
               </a:rPr>
               <a:t>첫 번째 생일</a:t>
@@ -3385,7 +3385,7 @@
             <a:r>
               <a:rPr sz="1700" b="0" i="1">
                 <a:solidFill>
-                  <a:srgbClr val="49562E"/>
+                  <a:srgbClr val="526728"/>
                 </a:solidFill>
               </a:rPr>
               <a:t>마이크를 잡으면 노래부터 시킬 겁니다</a:t>
@@ -3460,7 +3460,7 @@
     <p:bg>
       <p:bgPr>
         <a:solidFill>
-          <a:srgbClr val="F6F8F2"/>
+          <a:srgbClr val="F9FCF3"/>
         </a:solidFill>
         <a:effectLst/>
       </p:bgPr>
@@ -3487,7 +3487,7 @@
             <a:avLst/>
           </a:prstGeom>
           <a:solidFill>
-            <a:srgbClr val="E4EBD6"/>
+            <a:srgbClr val="EBF7D4"/>
           </a:solidFill>
           <a:ln>
             <a:noFill/>
@@ -3516,7 +3516,7 @@
             <a:avLst/>
           </a:prstGeom>
           <a:solidFill>
-            <a:srgbClr val="819852"/>
+            <a:srgbClr val="9DBF5A"/>
           </a:solidFill>
           <a:ln>
             <a:noFill/>
@@ -3560,7 +3560,7 @@
             <a:r>
               <a:rPr sz="3000" b="1" i="0">
                 <a:solidFill>
-                  <a:srgbClr val="49562E"/>
+                  <a:srgbClr val="526728"/>
                 </a:solidFill>
               </a:rPr>
               <a:t>우리 아기를 소개합니다</a:t>
@@ -3585,11 +3585,11 @@
             </a:avLst>
           </a:prstGeom>
           <a:solidFill>
-            <a:srgbClr val="E4EBD6"/>
+            <a:srgbClr val="EBF7D4"/>
           </a:solidFill>
           <a:ln w="19050">
             <a:solidFill>
-              <a:srgbClr val="819852"/>
+              <a:srgbClr val="9DBF5A"/>
             </a:solidFill>
             <a:prstDash val="dash"/>
           </a:ln>
@@ -3608,7 +3608,7 @@
             <a:r>
               <a:rPr sz="1400" b="0" i="0">
                 <a:solidFill>
-                  <a:srgbClr val="49562E"/>
+                  <a:srgbClr val="526728"/>
                 </a:solidFill>
               </a:rPr>
               <a:t>아기 사진을 넣어 주세요</a:t>
@@ -3648,7 +3648,7 @@
                       <a:r>
                         <a:rPr sz="1500" b="1">
                           <a:solidFill>
-                            <a:srgbClr val="49562E"/>
+                            <a:srgbClr val="526728"/>
                           </a:solidFill>
                         </a:rPr>
                         <a:t>이름</a:t>
@@ -3658,30 +3658,30 @@
                   <a:tcPr anchor="ctr" marL="73152" marR="73152">
                     <a:lnL w="9525" cap="flat" cmpd="sng" algn="ctr">
                       <a:solidFill>
-                        <a:srgbClr val="E4EBD6"/>
+                        <a:srgbClr val="EBF7D4"/>
                       </a:solidFill>
                       <a:prstDash val="solid"/>
                     </a:lnL>
                     <a:lnR w="9525" cap="flat" cmpd="sng" algn="ctr">
                       <a:solidFill>
-                        <a:srgbClr val="E4EBD6"/>
+                        <a:srgbClr val="EBF7D4"/>
                       </a:solidFill>
                       <a:prstDash val="solid"/>
                     </a:lnR>
                     <a:lnT w="9525" cap="flat" cmpd="sng" algn="ctr">
                       <a:solidFill>
-                        <a:srgbClr val="E4EBD6"/>
+                        <a:srgbClr val="EBF7D4"/>
                       </a:solidFill>
                       <a:prstDash val="solid"/>
                     </a:lnT>
                     <a:lnB w="9525" cap="flat" cmpd="sng" algn="ctr">
                       <a:solidFill>
-                        <a:srgbClr val="E4EBD6"/>
+                        <a:srgbClr val="EBF7D4"/>
                       </a:solidFill>
                       <a:prstDash val="solid"/>
                     </a:lnB>
                     <a:solidFill>
-                      <a:srgbClr val="E4EBD6"/>
+                      <a:srgbClr val="EBF7D4"/>
                     </a:solidFill>
                   </a:tcPr>
                 </a:tc>
@@ -3704,30 +3704,30 @@
                   <a:tcPr anchor="ctr" marL="73152" marR="73152">
                     <a:lnL w="9525" cap="flat" cmpd="sng" algn="ctr">
                       <a:solidFill>
-                        <a:srgbClr val="E4EBD6"/>
+                        <a:srgbClr val="EBF7D4"/>
                       </a:solidFill>
                       <a:prstDash val="solid"/>
                     </a:lnL>
                     <a:lnR w="9525" cap="flat" cmpd="sng" algn="ctr">
                       <a:solidFill>
-                        <a:srgbClr val="E4EBD6"/>
+                        <a:srgbClr val="EBF7D4"/>
                       </a:solidFill>
                       <a:prstDash val="solid"/>
                     </a:lnR>
                     <a:lnT w="9525" cap="flat" cmpd="sng" algn="ctr">
                       <a:solidFill>
-                        <a:srgbClr val="E4EBD6"/>
+                        <a:srgbClr val="EBF7D4"/>
                       </a:solidFill>
                       <a:prstDash val="solid"/>
                     </a:lnT>
                     <a:lnB w="9525" cap="flat" cmpd="sng" algn="ctr">
                       <a:solidFill>
-                        <a:srgbClr val="E4EBD6"/>
+                        <a:srgbClr val="EBF7D4"/>
                       </a:solidFill>
                       <a:prstDash val="solid"/>
                     </a:lnB>
                     <a:solidFill>
-                      <a:srgbClr val="F6F8F2"/>
+                      <a:srgbClr val="F9FCF3"/>
                     </a:solidFill>
                   </a:tcPr>
                 </a:tc>
@@ -3742,7 +3742,7 @@
                       <a:r>
                         <a:rPr sz="1500" b="1">
                           <a:solidFill>
-                            <a:srgbClr val="49562E"/>
+                            <a:srgbClr val="526728"/>
                           </a:solidFill>
                         </a:rPr>
                         <a:t>생일</a:t>
@@ -3752,30 +3752,30 @@
                   <a:tcPr anchor="ctr" marL="73152" marR="73152">
                     <a:lnL w="9525" cap="flat" cmpd="sng" algn="ctr">
                       <a:solidFill>
-                        <a:srgbClr val="E4EBD6"/>
+                        <a:srgbClr val="EBF7D4"/>
                       </a:solidFill>
                       <a:prstDash val="solid"/>
                     </a:lnL>
                     <a:lnR w="9525" cap="flat" cmpd="sng" algn="ctr">
                       <a:solidFill>
-                        <a:srgbClr val="E4EBD6"/>
+                        <a:srgbClr val="EBF7D4"/>
                       </a:solidFill>
                       <a:prstDash val="solid"/>
                     </a:lnR>
                     <a:lnT w="9525" cap="flat" cmpd="sng" algn="ctr">
                       <a:solidFill>
-                        <a:srgbClr val="E4EBD6"/>
+                        <a:srgbClr val="EBF7D4"/>
                       </a:solidFill>
                       <a:prstDash val="solid"/>
                     </a:lnT>
                     <a:lnB w="9525" cap="flat" cmpd="sng" algn="ctr">
                       <a:solidFill>
-                        <a:srgbClr val="E4EBD6"/>
+                        <a:srgbClr val="EBF7D4"/>
                       </a:solidFill>
                       <a:prstDash val="solid"/>
                     </a:lnB>
                     <a:solidFill>
-                      <a:srgbClr val="E4EBD6"/>
+                      <a:srgbClr val="EBF7D4"/>
                     </a:solidFill>
                   </a:tcPr>
                 </a:tc>
@@ -3798,25 +3798,25 @@
                   <a:tcPr anchor="ctr" marL="73152" marR="73152">
                     <a:lnL w="9525" cap="flat" cmpd="sng" algn="ctr">
                       <a:solidFill>
-                        <a:srgbClr val="E4EBD6"/>
+                        <a:srgbClr val="EBF7D4"/>
                       </a:solidFill>
                       <a:prstDash val="solid"/>
                     </a:lnL>
                     <a:lnR w="9525" cap="flat" cmpd="sng" algn="ctr">
                       <a:solidFill>
-                        <a:srgbClr val="E4EBD6"/>
+                        <a:srgbClr val="EBF7D4"/>
                       </a:solidFill>
                       <a:prstDash val="solid"/>
                     </a:lnR>
                     <a:lnT w="9525" cap="flat" cmpd="sng" algn="ctr">
                       <a:solidFill>
-                        <a:srgbClr val="E4EBD6"/>
+                        <a:srgbClr val="EBF7D4"/>
                       </a:solidFill>
                       <a:prstDash val="solid"/>
                     </a:lnT>
                     <a:lnB w="9525" cap="flat" cmpd="sng" algn="ctr">
                       <a:solidFill>
-                        <a:srgbClr val="E4EBD6"/>
+                        <a:srgbClr val="EBF7D4"/>
                       </a:solidFill>
                       <a:prstDash val="solid"/>
                     </a:lnB>
@@ -3836,7 +3836,7 @@
                       <a:r>
                         <a:rPr sz="1500" b="1">
                           <a:solidFill>
-                            <a:srgbClr val="49562E"/>
+                            <a:srgbClr val="526728"/>
                           </a:solidFill>
                         </a:rPr>
                         <a:t>키 · 몸무게</a:t>
@@ -3846,30 +3846,30 @@
                   <a:tcPr anchor="ctr" marL="73152" marR="73152">
                     <a:lnL w="9525" cap="flat" cmpd="sng" algn="ctr">
                       <a:solidFill>
-                        <a:srgbClr val="E4EBD6"/>
+                        <a:srgbClr val="EBF7D4"/>
                       </a:solidFill>
                       <a:prstDash val="solid"/>
                     </a:lnL>
                     <a:lnR w="9525" cap="flat" cmpd="sng" algn="ctr">
                       <a:solidFill>
-                        <a:srgbClr val="E4EBD6"/>
+                        <a:srgbClr val="EBF7D4"/>
                       </a:solidFill>
                       <a:prstDash val="solid"/>
                     </a:lnR>
                     <a:lnT w="9525" cap="flat" cmpd="sng" algn="ctr">
                       <a:solidFill>
-                        <a:srgbClr val="E4EBD6"/>
+                        <a:srgbClr val="EBF7D4"/>
                       </a:solidFill>
                       <a:prstDash val="solid"/>
                     </a:lnT>
                     <a:lnB w="9525" cap="flat" cmpd="sng" algn="ctr">
                       <a:solidFill>
-                        <a:srgbClr val="E4EBD6"/>
+                        <a:srgbClr val="EBF7D4"/>
                       </a:solidFill>
                       <a:prstDash val="solid"/>
                     </a:lnB>
                     <a:solidFill>
-                      <a:srgbClr val="E4EBD6"/>
+                      <a:srgbClr val="EBF7D4"/>
                     </a:solidFill>
                   </a:tcPr>
                 </a:tc>
@@ -3892,30 +3892,30 @@
                   <a:tcPr anchor="ctr" marL="73152" marR="73152">
                     <a:lnL w="9525" cap="flat" cmpd="sng" algn="ctr">
                       <a:solidFill>
-                        <a:srgbClr val="E4EBD6"/>
+                        <a:srgbClr val="EBF7D4"/>
                       </a:solidFill>
                       <a:prstDash val="solid"/>
                     </a:lnL>
                     <a:lnR w="9525" cap="flat" cmpd="sng" algn="ctr">
                       <a:solidFill>
-                        <a:srgbClr val="E4EBD6"/>
+                        <a:srgbClr val="EBF7D4"/>
                       </a:solidFill>
                       <a:prstDash val="solid"/>
                     </a:lnR>
                     <a:lnT w="9525" cap="flat" cmpd="sng" algn="ctr">
                       <a:solidFill>
-                        <a:srgbClr val="E4EBD6"/>
+                        <a:srgbClr val="EBF7D4"/>
                       </a:solidFill>
                       <a:prstDash val="solid"/>
                     </a:lnT>
                     <a:lnB w="9525" cap="flat" cmpd="sng" algn="ctr">
                       <a:solidFill>
-                        <a:srgbClr val="E4EBD6"/>
+                        <a:srgbClr val="EBF7D4"/>
                       </a:solidFill>
                       <a:prstDash val="solid"/>
                     </a:lnB>
                     <a:solidFill>
-                      <a:srgbClr val="F6F8F2"/>
+                      <a:srgbClr val="F9FCF3"/>
                     </a:solidFill>
                   </a:tcPr>
                 </a:tc>
@@ -3930,7 +3930,7 @@
                       <a:r>
                         <a:rPr sz="1500" b="1">
                           <a:solidFill>
-                            <a:srgbClr val="49562E"/>
+                            <a:srgbClr val="526728"/>
                           </a:solidFill>
                         </a:rPr>
                         <a:t>좋아하는 것</a:t>
@@ -3940,30 +3940,30 @@
                   <a:tcPr anchor="ctr" marL="73152" marR="73152">
                     <a:lnL w="9525" cap="flat" cmpd="sng" algn="ctr">
                       <a:solidFill>
-                        <a:srgbClr val="E4EBD6"/>
+                        <a:srgbClr val="EBF7D4"/>
                       </a:solidFill>
                       <a:prstDash val="solid"/>
                     </a:lnL>
                     <a:lnR w="9525" cap="flat" cmpd="sng" algn="ctr">
                       <a:solidFill>
-                        <a:srgbClr val="E4EBD6"/>
+                        <a:srgbClr val="EBF7D4"/>
                       </a:solidFill>
                       <a:prstDash val="solid"/>
                     </a:lnR>
                     <a:lnT w="9525" cap="flat" cmpd="sng" algn="ctr">
                       <a:solidFill>
-                        <a:srgbClr val="E4EBD6"/>
+                        <a:srgbClr val="EBF7D4"/>
                       </a:solidFill>
                       <a:prstDash val="solid"/>
                     </a:lnT>
                     <a:lnB w="9525" cap="flat" cmpd="sng" algn="ctr">
                       <a:solidFill>
-                        <a:srgbClr val="E4EBD6"/>
+                        <a:srgbClr val="EBF7D4"/>
                       </a:solidFill>
                       <a:prstDash val="solid"/>
                     </a:lnB>
                     <a:solidFill>
-                      <a:srgbClr val="E4EBD6"/>
+                      <a:srgbClr val="EBF7D4"/>
                     </a:solidFill>
                   </a:tcPr>
                 </a:tc>
@@ -3986,25 +3986,25 @@
                   <a:tcPr anchor="ctr" marL="73152" marR="73152">
                     <a:lnL w="9525" cap="flat" cmpd="sng" algn="ctr">
                       <a:solidFill>
-                        <a:srgbClr val="E4EBD6"/>
+                        <a:srgbClr val="EBF7D4"/>
                       </a:solidFill>
                       <a:prstDash val="solid"/>
                     </a:lnL>
                     <a:lnR w="9525" cap="flat" cmpd="sng" algn="ctr">
                       <a:solidFill>
-                        <a:srgbClr val="E4EBD6"/>
+                        <a:srgbClr val="EBF7D4"/>
                       </a:solidFill>
                       <a:prstDash val="solid"/>
                     </a:lnR>
                     <a:lnT w="9525" cap="flat" cmpd="sng" algn="ctr">
                       <a:solidFill>
-                        <a:srgbClr val="E4EBD6"/>
+                        <a:srgbClr val="EBF7D4"/>
                       </a:solidFill>
                       <a:prstDash val="solid"/>
                     </a:lnT>
                     <a:lnB w="9525" cap="flat" cmpd="sng" algn="ctr">
                       <a:solidFill>
-                        <a:srgbClr val="E4EBD6"/>
+                        <a:srgbClr val="EBF7D4"/>
                       </a:solidFill>
                       <a:prstDash val="solid"/>
                     </a:lnB>
@@ -4024,7 +4024,7 @@
                       <a:r>
                         <a:rPr sz="1500" b="1">
                           <a:solidFill>
-                            <a:srgbClr val="49562E"/>
+                            <a:srgbClr val="526728"/>
                           </a:solidFill>
                         </a:rPr>
                         <a:t>별명</a:t>
@@ -4034,30 +4034,30 @@
                   <a:tcPr anchor="ctr" marL="73152" marR="73152">
                     <a:lnL w="9525" cap="flat" cmpd="sng" algn="ctr">
                       <a:solidFill>
-                        <a:srgbClr val="E4EBD6"/>
+                        <a:srgbClr val="EBF7D4"/>
                       </a:solidFill>
                       <a:prstDash val="solid"/>
                     </a:lnL>
                     <a:lnR w="9525" cap="flat" cmpd="sng" algn="ctr">
                       <a:solidFill>
-                        <a:srgbClr val="E4EBD6"/>
+                        <a:srgbClr val="EBF7D4"/>
                       </a:solidFill>
                       <a:prstDash val="solid"/>
                     </a:lnR>
                     <a:lnT w="9525" cap="flat" cmpd="sng" algn="ctr">
                       <a:solidFill>
-                        <a:srgbClr val="E4EBD6"/>
+                        <a:srgbClr val="EBF7D4"/>
                       </a:solidFill>
                       <a:prstDash val="solid"/>
                     </a:lnT>
                     <a:lnB w="9525" cap="flat" cmpd="sng" algn="ctr">
                       <a:solidFill>
-                        <a:srgbClr val="E4EBD6"/>
+                        <a:srgbClr val="EBF7D4"/>
                       </a:solidFill>
                       <a:prstDash val="solid"/>
                     </a:lnB>
                     <a:solidFill>
-                      <a:srgbClr val="E4EBD6"/>
+                      <a:srgbClr val="EBF7D4"/>
                     </a:solidFill>
                   </a:tcPr>
                 </a:tc>
@@ -4080,30 +4080,30 @@
                   <a:tcPr anchor="ctr" marL="73152" marR="73152">
                     <a:lnL w="9525" cap="flat" cmpd="sng" algn="ctr">
                       <a:solidFill>
-                        <a:srgbClr val="E4EBD6"/>
+                        <a:srgbClr val="EBF7D4"/>
                       </a:solidFill>
                       <a:prstDash val="solid"/>
                     </a:lnL>
                     <a:lnR w="9525" cap="flat" cmpd="sng" algn="ctr">
                       <a:solidFill>
-                        <a:srgbClr val="E4EBD6"/>
+                        <a:srgbClr val="EBF7D4"/>
                       </a:solidFill>
                       <a:prstDash val="solid"/>
                     </a:lnR>
                     <a:lnT w="9525" cap="flat" cmpd="sng" algn="ctr">
                       <a:solidFill>
-                        <a:srgbClr val="E4EBD6"/>
+                        <a:srgbClr val="EBF7D4"/>
                       </a:solidFill>
                       <a:prstDash val="solid"/>
                     </a:lnT>
                     <a:lnB w="9525" cap="flat" cmpd="sng" algn="ctr">
                       <a:solidFill>
-                        <a:srgbClr val="E4EBD6"/>
+                        <a:srgbClr val="EBF7D4"/>
                       </a:solidFill>
                       <a:prstDash val="solid"/>
                     </a:lnB>
                     <a:solidFill>
-                      <a:srgbClr val="F6F8F2"/>
+                      <a:srgbClr val="F9FCF3"/>
                     </a:solidFill>
                   </a:tcPr>
                 </a:tc>
@@ -4118,7 +4118,7 @@
                       <a:r>
                         <a:rPr sz="1500" b="1">
                           <a:solidFill>
-                            <a:srgbClr val="49562E"/>
+                            <a:srgbClr val="526728"/>
                           </a:solidFill>
                         </a:rPr>
                         <a:t>부모의 마음</a:t>
@@ -4128,30 +4128,30 @@
                   <a:tcPr anchor="ctr" marL="73152" marR="73152">
                     <a:lnL w="9525" cap="flat" cmpd="sng" algn="ctr">
                       <a:solidFill>
-                        <a:srgbClr val="E4EBD6"/>
+                        <a:srgbClr val="EBF7D4"/>
                       </a:solidFill>
                       <a:prstDash val="solid"/>
                     </a:lnL>
                     <a:lnR w="9525" cap="flat" cmpd="sng" algn="ctr">
                       <a:solidFill>
-                        <a:srgbClr val="E4EBD6"/>
+                        <a:srgbClr val="EBF7D4"/>
                       </a:solidFill>
                       <a:prstDash val="solid"/>
                     </a:lnR>
                     <a:lnT w="9525" cap="flat" cmpd="sng" algn="ctr">
                       <a:solidFill>
-                        <a:srgbClr val="E4EBD6"/>
+                        <a:srgbClr val="EBF7D4"/>
                       </a:solidFill>
                       <a:prstDash val="solid"/>
                     </a:lnT>
                     <a:lnB w="9525" cap="flat" cmpd="sng" algn="ctr">
                       <a:solidFill>
-                        <a:srgbClr val="E4EBD6"/>
+                        <a:srgbClr val="EBF7D4"/>
                       </a:solidFill>
                       <a:prstDash val="solid"/>
                     </a:lnB>
                     <a:solidFill>
-                      <a:srgbClr val="E4EBD6"/>
+                      <a:srgbClr val="EBF7D4"/>
                     </a:solidFill>
                   </a:tcPr>
                 </a:tc>
@@ -4174,25 +4174,25 @@
                   <a:tcPr anchor="ctr" marL="73152" marR="73152">
                     <a:lnL w="9525" cap="flat" cmpd="sng" algn="ctr">
                       <a:solidFill>
-                        <a:srgbClr val="E4EBD6"/>
+                        <a:srgbClr val="EBF7D4"/>
                       </a:solidFill>
                       <a:prstDash val="solid"/>
                     </a:lnL>
                     <a:lnR w="9525" cap="flat" cmpd="sng" algn="ctr">
                       <a:solidFill>
-                        <a:srgbClr val="E4EBD6"/>
+                        <a:srgbClr val="EBF7D4"/>
                       </a:solidFill>
                       <a:prstDash val="solid"/>
                     </a:lnR>
                     <a:lnT w="9525" cap="flat" cmpd="sng" algn="ctr">
                       <a:solidFill>
-                        <a:srgbClr val="E4EBD6"/>
+                        <a:srgbClr val="EBF7D4"/>
                       </a:solidFill>
                       <a:prstDash val="solid"/>
                     </a:lnT>
                     <a:lnB w="9525" cap="flat" cmpd="sng" algn="ctr">
                       <a:solidFill>
-                        <a:srgbClr val="E4EBD6"/>
+                        <a:srgbClr val="EBF7D4"/>
                       </a:solidFill>
                       <a:prstDash val="solid"/>
                     </a:lnB>
@@ -4220,7 +4220,7 @@
     <p:bg>
       <p:bgPr>
         <a:solidFill>
-          <a:srgbClr val="F6F8F2"/>
+          <a:srgbClr val="F9FCF3"/>
         </a:solidFill>
         <a:effectLst/>
       </p:bgPr>
@@ -4247,7 +4247,7 @@
             <a:avLst/>
           </a:prstGeom>
           <a:solidFill>
-            <a:srgbClr val="E4EBD6"/>
+            <a:srgbClr val="EBF7D4"/>
           </a:solidFill>
           <a:ln>
             <a:noFill/>
@@ -4276,7 +4276,7 @@
             <a:avLst/>
           </a:prstGeom>
           <a:solidFill>
-            <a:srgbClr val="819852"/>
+            <a:srgbClr val="9DBF5A"/>
           </a:solidFill>
           <a:ln>
             <a:noFill/>
@@ -4320,7 +4320,7 @@
             <a:r>
               <a:rPr sz="3000" b="1" i="0">
                 <a:solidFill>
-                  <a:srgbClr val="49562E"/>
+                  <a:srgbClr val="526728"/>
                 </a:solidFill>
               </a:rPr>
               <a:t>돌잡이 이야기</a:t>
@@ -4345,11 +4345,11 @@
             </a:avLst>
           </a:prstGeom>
           <a:solidFill>
-            <a:srgbClr val="F6F8F2"/>
+            <a:srgbClr val="F9FCF3"/>
           </a:solidFill>
           <a:ln w="15875">
             <a:solidFill>
-              <a:srgbClr val="E4EBD6"/>
+              <a:srgbClr val="EBF7D4"/>
             </a:solidFill>
           </a:ln>
         </p:spPr>
@@ -4376,7 +4376,7 @@
             <a:avLst/>
           </a:prstGeom>
           <a:solidFill>
-            <a:srgbClr val="819852"/>
+            <a:srgbClr val="9DBF5A"/>
           </a:solidFill>
           <a:ln>
             <a:noFill/>
@@ -4434,7 +4434,7 @@
             <a:r>
               <a:rPr sz="1600" b="1" i="0">
                 <a:solidFill>
-                  <a:srgbClr val="49562E"/>
+                  <a:srgbClr val="526728"/>
                 </a:solidFill>
               </a:rPr>
               <a:t>연필 · 공부</a:t>
@@ -4497,11 +4497,11 @@
             </a:avLst>
           </a:prstGeom>
           <a:solidFill>
-            <a:srgbClr val="F6F8F2"/>
+            <a:srgbClr val="F9FCF3"/>
           </a:solidFill>
           <a:ln w="15875">
             <a:solidFill>
-              <a:srgbClr val="E4EBD6"/>
+              <a:srgbClr val="EBF7D4"/>
             </a:solidFill>
           </a:ln>
         </p:spPr>
@@ -4528,7 +4528,7 @@
             <a:avLst/>
           </a:prstGeom>
           <a:solidFill>
-            <a:srgbClr val="819852"/>
+            <a:srgbClr val="9DBF5A"/>
           </a:solidFill>
           <a:ln>
             <a:noFill/>
@@ -4586,7 +4586,7 @@
             <a:r>
               <a:rPr sz="1600" b="1" i="0">
                 <a:solidFill>
-                  <a:srgbClr val="49562E"/>
+                  <a:srgbClr val="526728"/>
                 </a:solidFill>
               </a:rPr>
               <a:t>실 · 장수</a:t>
@@ -4649,11 +4649,11 @@
             </a:avLst>
           </a:prstGeom>
           <a:solidFill>
-            <a:srgbClr val="F6F8F2"/>
+            <a:srgbClr val="F9FCF3"/>
           </a:solidFill>
           <a:ln w="15875">
             <a:solidFill>
-              <a:srgbClr val="E4EBD6"/>
+              <a:srgbClr val="EBF7D4"/>
             </a:solidFill>
           </a:ln>
         </p:spPr>
@@ -4680,7 +4680,7 @@
             <a:avLst/>
           </a:prstGeom>
           <a:solidFill>
-            <a:srgbClr val="819852"/>
+            <a:srgbClr val="9DBF5A"/>
           </a:solidFill>
           <a:ln>
             <a:noFill/>
@@ -4738,7 +4738,7 @@
             <a:r>
               <a:rPr sz="1600" b="1" i="0">
                 <a:solidFill>
-                  <a:srgbClr val="49562E"/>
+                  <a:srgbClr val="526728"/>
                 </a:solidFill>
               </a:rPr>
               <a:t>돈 · 부</a:t>
@@ -4801,11 +4801,11 @@
             </a:avLst>
           </a:prstGeom>
           <a:solidFill>
-            <a:srgbClr val="F6F8F2"/>
+            <a:srgbClr val="F9FCF3"/>
           </a:solidFill>
           <a:ln w="15875">
             <a:solidFill>
-              <a:srgbClr val="E4EBD6"/>
+              <a:srgbClr val="EBF7D4"/>
             </a:solidFill>
           </a:ln>
         </p:spPr>
@@ -4832,7 +4832,7 @@
             <a:avLst/>
           </a:prstGeom>
           <a:solidFill>
-            <a:srgbClr val="819852"/>
+            <a:srgbClr val="9DBF5A"/>
           </a:solidFill>
           <a:ln>
             <a:noFill/>
@@ -4890,7 +4890,7 @@
             <a:r>
               <a:rPr sz="1600" b="1" i="0">
                 <a:solidFill>
-                  <a:srgbClr val="49562E"/>
+                  <a:srgbClr val="526728"/>
                 </a:solidFill>
               </a:rPr>
               <a:t>마이크 · 인기</a:t>
@@ -4950,7 +4950,7 @@
     <p:bg>
       <p:bgPr>
         <a:solidFill>
-          <a:srgbClr val="F6F8F2"/>
+          <a:srgbClr val="F9FCF3"/>
         </a:solidFill>
         <a:effectLst/>
       </p:bgPr>
@@ -4977,7 +4977,7 @@
             <a:avLst/>
           </a:prstGeom>
           <a:solidFill>
-            <a:srgbClr val="E4EBD6"/>
+            <a:srgbClr val="EBF7D4"/>
           </a:solidFill>
           <a:ln>
             <a:noFill/>
@@ -5006,7 +5006,7 @@
             <a:avLst/>
           </a:prstGeom>
           <a:solidFill>
-            <a:srgbClr val="819852"/>
+            <a:srgbClr val="9DBF5A"/>
           </a:solidFill>
           <a:ln>
             <a:noFill/>
@@ -5050,7 +5050,7 @@
             <a:r>
               <a:rPr sz="3000" b="1" i="0">
                 <a:solidFill>
-                  <a:srgbClr val="49562E"/>
+                  <a:srgbClr val="526728"/>
                 </a:solidFill>
               </a:rPr>
               <a:t>우리 아기의 선택은?</a:t>
@@ -5075,11 +5075,11 @@
             </a:avLst>
           </a:prstGeom>
           <a:solidFill>
-            <a:srgbClr val="E4EBD6"/>
+            <a:srgbClr val="EBF7D4"/>
           </a:solidFill>
           <a:ln w="19050">
             <a:solidFill>
-              <a:srgbClr val="819852"/>
+              <a:srgbClr val="9DBF5A"/>
             </a:solidFill>
             <a:prstDash val="dash"/>
           </a:ln>
@@ -5098,7 +5098,7 @@
             <a:r>
               <a:rPr sz="1400" b="0" i="0">
                 <a:solidFill>
-                  <a:srgbClr val="49562E"/>
+                  <a:srgbClr val="526728"/>
                 </a:solidFill>
               </a:rPr>
               <a:t>돌잡이 사진</a:t>
@@ -5123,11 +5123,11 @@
             </a:avLst>
           </a:prstGeom>
           <a:solidFill>
-            <a:srgbClr val="F6F8F2"/>
+            <a:srgbClr val="F9FCF3"/>
           </a:solidFill>
           <a:ln w="12700">
             <a:solidFill>
-              <a:srgbClr val="E4EBD6"/>
+              <a:srgbClr val="EBF7D4"/>
             </a:solidFill>
           </a:ln>
         </p:spPr>
@@ -5251,7 +5251,7 @@
     <p:bg>
       <p:bgPr>
         <a:solidFill>
-          <a:srgbClr val="F6F8F2"/>
+          <a:srgbClr val="F9FCF3"/>
         </a:solidFill>
         <a:effectLst/>
       </p:bgPr>
@@ -5278,7 +5278,7 @@
             <a:avLst/>
           </a:prstGeom>
           <a:solidFill>
-            <a:srgbClr val="E4EBD6"/>
+            <a:srgbClr val="EBF7D4"/>
           </a:solidFill>
           <a:ln>
             <a:noFill/>
@@ -5307,7 +5307,7 @@
             <a:avLst/>
           </a:prstGeom>
           <a:solidFill>
-            <a:srgbClr val="819852"/>
+            <a:srgbClr val="9DBF5A"/>
           </a:solidFill>
           <a:ln>
             <a:noFill/>
@@ -5351,7 +5351,7 @@
             <a:r>
               <a:rPr sz="3000" b="1" i="0">
                 <a:solidFill>
-                  <a:srgbClr val="49562E"/>
+                  <a:srgbClr val="526728"/>
                 </a:solidFill>
               </a:rPr>
               <a:t>사진 모음</a:t>
@@ -5376,11 +5376,11 @@
             </a:avLst>
           </a:prstGeom>
           <a:solidFill>
-            <a:srgbClr val="E4EBD6"/>
+            <a:srgbClr val="EBF7D4"/>
           </a:solidFill>
           <a:ln w="19050">
             <a:solidFill>
-              <a:srgbClr val="819852"/>
+              <a:srgbClr val="9DBF5A"/>
             </a:solidFill>
             <a:prstDash val="dash"/>
           </a:ln>
@@ -5399,7 +5399,7 @@
             <a:r>
               <a:rPr sz="1200" b="0" i="0">
                 <a:solidFill>
-                  <a:srgbClr val="49562E"/>
+                  <a:srgbClr val="526728"/>
                 </a:solidFill>
               </a:rPr>
               <a:t>사진 1</a:t>
@@ -5424,11 +5424,11 @@
             </a:avLst>
           </a:prstGeom>
           <a:solidFill>
-            <a:srgbClr val="E4EBD6"/>
+            <a:srgbClr val="EBF7D4"/>
           </a:solidFill>
           <a:ln w="19050">
             <a:solidFill>
-              <a:srgbClr val="819852"/>
+              <a:srgbClr val="9DBF5A"/>
             </a:solidFill>
             <a:prstDash val="dash"/>
           </a:ln>
@@ -5447,7 +5447,7 @@
             <a:r>
               <a:rPr sz="1200" b="0" i="0">
                 <a:solidFill>
-                  <a:srgbClr val="49562E"/>
+                  <a:srgbClr val="526728"/>
                 </a:solidFill>
               </a:rPr>
               <a:t>사진 2</a:t>
@@ -5472,11 +5472,11 @@
             </a:avLst>
           </a:prstGeom>
           <a:solidFill>
-            <a:srgbClr val="E4EBD6"/>
+            <a:srgbClr val="EBF7D4"/>
           </a:solidFill>
           <a:ln w="19050">
             <a:solidFill>
-              <a:srgbClr val="819852"/>
+              <a:srgbClr val="9DBF5A"/>
             </a:solidFill>
             <a:prstDash val="dash"/>
           </a:ln>
@@ -5495,7 +5495,7 @@
             <a:r>
               <a:rPr sz="1200" b="0" i="0">
                 <a:solidFill>
-                  <a:srgbClr val="49562E"/>
+                  <a:srgbClr val="526728"/>
                 </a:solidFill>
               </a:rPr>
               <a:t>사진 3</a:t>
@@ -5520,11 +5520,11 @@
             </a:avLst>
           </a:prstGeom>
           <a:solidFill>
-            <a:srgbClr val="E4EBD6"/>
+            <a:srgbClr val="EBF7D4"/>
           </a:solidFill>
           <a:ln w="19050">
             <a:solidFill>
-              <a:srgbClr val="819852"/>
+              <a:srgbClr val="9DBF5A"/>
             </a:solidFill>
             <a:prstDash val="dash"/>
           </a:ln>
@@ -5543,7 +5543,7 @@
             <a:r>
               <a:rPr sz="1200" b="0" i="0">
                 <a:solidFill>
-                  <a:srgbClr val="49562E"/>
+                  <a:srgbClr val="526728"/>
                 </a:solidFill>
               </a:rPr>
               <a:t>사진 4</a:t>
@@ -5568,11 +5568,11 @@
             </a:avLst>
           </a:prstGeom>
           <a:solidFill>
-            <a:srgbClr val="E4EBD6"/>
+            <a:srgbClr val="EBF7D4"/>
           </a:solidFill>
           <a:ln w="19050">
             <a:solidFill>
-              <a:srgbClr val="819852"/>
+              <a:srgbClr val="9DBF5A"/>
             </a:solidFill>
             <a:prstDash val="dash"/>
           </a:ln>
@@ -5591,7 +5591,7 @@
             <a:r>
               <a:rPr sz="1200" b="0" i="0">
                 <a:solidFill>
-                  <a:srgbClr val="49562E"/>
+                  <a:srgbClr val="526728"/>
                 </a:solidFill>
               </a:rPr>
               <a:t>사진 5</a:t>
@@ -5616,11 +5616,11 @@
             </a:avLst>
           </a:prstGeom>
           <a:solidFill>
-            <a:srgbClr val="E4EBD6"/>
+            <a:srgbClr val="EBF7D4"/>
           </a:solidFill>
           <a:ln w="19050">
             <a:solidFill>
-              <a:srgbClr val="819852"/>
+              <a:srgbClr val="9DBF5A"/>
             </a:solidFill>
             <a:prstDash val="dash"/>
           </a:ln>
@@ -5639,7 +5639,7 @@
             <a:r>
               <a:rPr sz="1200" b="0" i="0">
                 <a:solidFill>
-                  <a:srgbClr val="49562E"/>
+                  <a:srgbClr val="526728"/>
                 </a:solidFill>
               </a:rPr>
               <a:t>사진 6</a:t>
@@ -5664,11 +5664,11 @@
             </a:avLst>
           </a:prstGeom>
           <a:solidFill>
-            <a:srgbClr val="E4EBD6"/>
+            <a:srgbClr val="EBF7D4"/>
           </a:solidFill>
           <a:ln w="19050">
             <a:solidFill>
-              <a:srgbClr val="819852"/>
+              <a:srgbClr val="9DBF5A"/>
             </a:solidFill>
             <a:prstDash val="dash"/>
           </a:ln>
@@ -5687,7 +5687,7 @@
             <a:r>
               <a:rPr sz="1200" b="0" i="0">
                 <a:solidFill>
-                  <a:srgbClr val="49562E"/>
+                  <a:srgbClr val="526728"/>
                 </a:solidFill>
               </a:rPr>
               <a:t>사진 7</a:t>
@@ -5712,11 +5712,11 @@
             </a:avLst>
           </a:prstGeom>
           <a:solidFill>
-            <a:srgbClr val="E4EBD6"/>
+            <a:srgbClr val="EBF7D4"/>
           </a:solidFill>
           <a:ln w="19050">
             <a:solidFill>
-              <a:srgbClr val="819852"/>
+              <a:srgbClr val="9DBF5A"/>
             </a:solidFill>
             <a:prstDash val="dash"/>
           </a:ln>
@@ -5735,7 +5735,7 @@
             <a:r>
               <a:rPr sz="1200" b="0" i="0">
                 <a:solidFill>
-                  <a:srgbClr val="49562E"/>
+                  <a:srgbClr val="526728"/>
                 </a:solidFill>
               </a:rPr>
               <a:t>사진 8</a:t>
@@ -5815,7 +5815,7 @@
             <a:r>
               <a:rPr sz="3400" b="1" i="0">
                 <a:solidFill>
-                  <a:srgbClr val="49562E"/>
+                  <a:srgbClr val="526728"/>
                 </a:solidFill>
               </a:rPr>
               <a:t>와 주셔서 고맙습니다</a:t>
@@ -5853,7 +5853,7 @@
             <a:r>
               <a:rPr sz="1700" b="0" i="1">
                 <a:solidFill>
-                  <a:srgbClr val="49562E"/>
+                  <a:srgbClr val="526728"/>
                 </a:solidFill>
               </a:rPr>
               <a:t>아이가 한 살이 되었습니다</a:t>
@@ -5918,34 +5918,34 @@
         <a:sysClr val="window" lastClr="FFFFFF"/>
       </a:lt1>
       <a:dk2>
-        <a:srgbClr val="49562E"/>
+        <a:srgbClr val="526728"/>
       </a:dk2>
       <a:lt2>
-        <a:srgbClr val="F6F8F2"/>
+        <a:srgbClr val="F9FCF3"/>
       </a:lt2>
       <a:accent1>
-        <a:srgbClr val="819852"/>
+        <a:srgbClr val="9DBF5A"/>
       </a:accent1>
       <a:accent2>
-        <a:srgbClr val="475285"/>
+        <a:srgbClr val="339941"/>
       </a:accent2>
       <a:accent3>
-        <a:srgbClr val="49562E"/>
+        <a:srgbClr val="526728"/>
       </a:accent3>
       <a:accent4>
-        <a:srgbClr val="E4EBD6"/>
+        <a:srgbClr val="EBF7D4"/>
       </a:accent4>
       <a:accent5>
-        <a:srgbClr val="64756C"/>
+        <a:srgbClr val="68AC4E"/>
       </a:accent5>
       <a:accent6>
-        <a:srgbClr val="929A82"/>
+        <a:srgbClr val="97A47E"/>
       </a:accent6>
       <a:hlink>
-        <a:srgbClr val="819852"/>
+        <a:srgbClr val="9DBF5A"/>
       </a:hlink>
       <a:folHlink>
-        <a:srgbClr val="49562E"/>
+        <a:srgbClr val="526728"/>
       </a:folHlink>
     </a:clrScheme>
     <a:fontScheme name="Office">

--- a/public/fun/pack/pptx/birthday/돌잔치_12_돌잡이중심_아카시아길.pptx
+++ b/public/fun/pack/pptx/birthday/돌잔치_12_돌잡이중심_아카시아길.pptx
@@ -3286,6 +3286,14 @@
 <file path=ppt/slides/slide1.xml><?xml version="1.0" encoding="utf-8"?>
 <p:sld xmlns:a="http://schemas.openxmlformats.org/drawingml/2006/main" xmlns:p="http://schemas.openxmlformats.org/presentationml/2006/main" xmlns:r="http://schemas.openxmlformats.org/officeDocument/2006/relationships">
   <p:cSld>
+    <p:bg>
+      <p:bgPr>
+        <a:solidFill>
+          <a:srgbClr val="F7FDEA"/>
+        </a:solidFill>
+        <a:effectLst/>
+      </p:bgPr>
+    </p:bg>
     <p:spTree>
       <p:nvGrpSpPr>
         <p:cNvPr id="1" name=""/>
@@ -3293,30 +3301,116 @@
         <p:nvPr/>
       </p:nvGrpSpPr>
       <p:grpSpPr/>
-      <p:pic>
-        <p:nvPicPr>
-          <p:cNvPr id="3" name="표지 그림" descr="birthday-12.jpg"/>
-          <p:cNvPicPr>
-            <a:picLocks noChangeAspect="1"/>
-          </p:cNvPicPr>
+      <p:sp>
+        <p:nvSpPr>
+          <p:cNvPr id="3" name="사진 자리"/>
+          <p:cNvSpPr/>
           <p:nvPr/>
-        </p:nvPicPr>
-        <p:blipFill>
-          <a:blip r:embed="rId2"/>
-          <a:stretch>
-            <a:fillRect/>
-          </a:stretch>
-        </p:blipFill>
-        <p:spPr>
-          <a:xfrm>
-            <a:off x="0" y="0"/>
-            <a:ext cx="12191695" cy="6858000"/>
+        </p:nvSpPr>
+        <p:spPr>
+          <a:xfrm>
+            <a:off x="7802684" y="0"/>
+            <a:ext cx="4389010" cy="6858000"/>
           </a:xfrm>
           <a:prstGeom prst="rect">
             <a:avLst/>
           </a:prstGeom>
-        </p:spPr>
-      </p:pic>
+          <a:solidFill>
+            <a:srgbClr val="D9F2A6"/>
+          </a:solidFill>
+          <a:ln>
+            <a:noFill/>
+          </a:ln>
+        </p:spPr>
+        <p:txBody>
+          <a:bodyPr rtlCol="0" anchor="ctr" wrap="square" lIns="54864" rIns="54864" tIns="27432" bIns="27432">
+            <a:noAutofit/>
+          </a:bodyPr>
+          <a:lstStyle/>
+          <a:p>
+            <a:pPr algn="ctr">
+              <a:lnSpc>
+                <a:spcPct val="100000"/>
+              </a:lnSpc>
+            </a:pPr>
+            <a:r>
+              <a:rPr sz="1400" b="0" i="0">
+                <a:solidFill>
+                  <a:srgbClr val="3E4927"/>
+                </a:solidFill>
+              </a:rPr>
+              <a:t>사진을 넣어 주세요</a:t>
+            </a:r>
+          </a:p>
+        </p:txBody>
+      </p:sp>
+      <p:sp>
+        <p:nvSpPr>
+          <p:cNvPr id="4" name="장식"/>
+          <p:cNvSpPr/>
+          <p:nvPr/>
+        </p:nvSpPr>
+        <p:spPr>
+          <a:xfrm>
+            <a:off x="8168435" y="365760"/>
+            <a:ext cx="3657508" cy="6126480"/>
+          </a:xfrm>
+          <a:prstGeom prst="rect">
+            <a:avLst/>
+          </a:prstGeom>
+          <a:noFill/>
+          <a:ln w="9525">
+            <a:solidFill>
+              <a:srgbClr val="26231F"/>
+            </a:solidFill>
+          </a:ln>
+        </p:spPr>
+        <p:txBody>
+          <a:bodyPr rtlCol="0" anchor="ctr"/>
+          <a:lstStyle/>
+          <a:p>
+            <a:pPr algn="ctr"/>
+          </a:p>
+        </p:txBody>
+      </p:sp>
+      <p:sp>
+        <p:nvSpPr>
+          <p:cNvPr id="5" name="라벨"/>
+          <p:cNvSpPr txBox="1"/>
+          <p:nvPr/>
+        </p:nvSpPr>
+        <p:spPr>
+          <a:xfrm>
+            <a:off x="822960" y="2148840"/>
+            <a:ext cx="5608179" cy="274320"/>
+          </a:xfrm>
+          <a:prstGeom prst="rect">
+            <a:avLst/>
+          </a:prstGeom>
+          <a:noFill/>
+        </p:spPr>
+        <p:txBody>
+          <a:bodyPr wrap="square" lIns="54864" rIns="54864" tIns="27432" bIns="27432" anchor="t">
+            <a:noAutofit/>
+          </a:bodyPr>
+          <a:lstStyle/>
+          <a:p>
+            <a:pPr algn="l">
+              <a:lnSpc>
+                <a:spcPct val="115000"/>
+              </a:lnSpc>
+            </a:pPr>
+            <a:r>
+              <a:rPr sz="1000" b="1" i="0" spc="250">
+                <a:solidFill>
+                  <a:srgbClr val="26231F"/>
+                </a:solidFill>
+              </a:rPr>
+              <a:t>FIRST BIRTHDAY</a:t>
+            </a:r>
+          </a:p>
+        </p:txBody>
+      </p:sp>
       <p:sp>
         <p:nvSpPr>
           <p:cNvPr id="2" name="Title 1"/>
@@ -3329,8 +3423,8 @@
         </p:nvSpPr>
         <p:spPr>
           <a:xfrm>
-            <a:off x="853418" y="2057400"/>
-            <a:ext cx="6095847" cy="1554480"/>
+            <a:off x="822960" y="2606040"/>
+            <a:ext cx="5608179" cy="1188720"/>
           </a:xfrm>
         </p:spPr>
         <p:txBody>
@@ -3347,7 +3441,7 @@
             <a:r>
               <a:rPr sz="4000" b="1" i="0">
                 <a:solidFill>
-                  <a:srgbClr val="526728"/>
+                  <a:srgbClr val="26231F"/>
                 </a:solidFill>
               </a:rPr>
               <a:t>첫 번째 생일</a:t>
@@ -3357,14 +3451,14 @@
       </p:sp>
       <p:sp>
         <p:nvSpPr>
-          <p:cNvPr id="4" name="한 줄 문구"/>
+          <p:cNvPr id="6" name="한 줄 문구"/>
           <p:cNvSpPr txBox="1"/>
           <p:nvPr/>
         </p:nvSpPr>
         <p:spPr>
           <a:xfrm>
-            <a:off x="853418" y="3749039"/>
-            <a:ext cx="6095847" cy="822960"/>
+            <a:off x="822960" y="3886200"/>
+            <a:ext cx="5608179" cy="822960"/>
           </a:xfrm>
           <a:prstGeom prst="rect">
             <a:avLst/>
@@ -3383,9 +3477,9 @@
               </a:lnSpc>
             </a:pPr>
             <a:r>
-              <a:rPr sz="1700" b="0" i="1">
-                <a:solidFill>
-                  <a:srgbClr val="526728"/>
+              <a:rPr sz="1700" b="0" i="0">
+                <a:solidFill>
+                  <a:srgbClr val="26231F"/>
                 </a:solidFill>
               </a:rPr>
               <a:t>마이크를 잡으면 노래부터 시킬 겁니다</a:t>
@@ -3395,14 +3489,14 @@
       </p:sp>
       <p:sp>
         <p:nvSpPr>
-          <p:cNvPr id="5" name="안내 문구"/>
+          <p:cNvPr id="7" name="안내 문구"/>
           <p:cNvSpPr txBox="1"/>
           <p:nvPr/>
         </p:nvSpPr>
         <p:spPr>
           <a:xfrm>
-            <a:off x="853418" y="4617720"/>
-            <a:ext cx="6095847" cy="914400"/>
+            <a:off x="822960" y="4754880"/>
+            <a:ext cx="5608179" cy="914400"/>
           </a:xfrm>
           <a:prstGeom prst="rect">
             <a:avLst/>
@@ -3423,10 +3517,10 @@
             <a:r>
               <a:rPr sz="1400" b="0" i="0">
                 <a:solidFill>
-                  <a:srgbClr val="666666"/>
+                  <a:srgbClr val="26231F"/>
                 </a:solidFill>
               </a:rPr>
-              <a:t>아기 이름 · 2027. 00. 00</a:t>
+              <a:t>아기 이름 · 날짜 입력</a:t>
             </a:r>
           </a:p>
           <a:p>
@@ -3438,7 +3532,7 @@
             <a:r>
               <a:rPr sz="1400" b="0" i="0">
                 <a:solidFill>
-                  <a:srgbClr val="666666"/>
+                  <a:srgbClr val="26231F"/>
                 </a:solidFill>
               </a:rPr>
               <a:t>장소를 입력하세요</a:t>
@@ -3460,7 +3554,7 @@
     <p:bg>
       <p:bgPr>
         <a:solidFill>
-          <a:srgbClr val="F9FCF3"/>
+          <a:srgbClr val="FCFDFA"/>
         </a:solidFill>
         <a:effectLst/>
       </p:bgPr>
@@ -3480,14 +3574,16 @@
         </p:nvSpPr>
         <p:spPr>
           <a:xfrm>
-            <a:off x="0" y="6035040"/>
-            <a:ext cx="1737360" cy="822960"/>
-          </a:xfrm>
-          <a:prstGeom prst="rtTriangle">
-            <a:avLst/>
+            <a:off x="640080" y="566928"/>
+            <a:ext cx="64008" cy="868680"/>
+          </a:xfrm>
+          <a:prstGeom prst="roundRect">
+            <a:avLst>
+              <a:gd name="adj" fmla="val 50000"/>
+            </a:avLst>
           </a:prstGeom>
           <a:solidFill>
-            <a:srgbClr val="EBF7D4"/>
+            <a:srgbClr val="D0ED97"/>
           </a:solidFill>
           <a:ln>
             <a:noFill/>
@@ -3503,20 +3599,58 @@
       </p:sp>
       <p:sp>
         <p:nvSpPr>
-          <p:cNvPr id="4" name="장식"/>
+          <p:cNvPr id="4" name="상단 라벨"/>
+          <p:cNvSpPr txBox="1"/>
+          <p:nvPr/>
+        </p:nvSpPr>
+        <p:spPr>
+          <a:xfrm>
+            <a:off x="868680" y="274320"/>
+            <a:ext cx="5486400" cy="274320"/>
+          </a:xfrm>
+          <a:prstGeom prst="rect">
+            <a:avLst/>
+          </a:prstGeom>
+          <a:noFill/>
+        </p:spPr>
+        <p:txBody>
+          <a:bodyPr wrap="square" lIns="54864" rIns="54864" tIns="27432" bIns="27432" anchor="ctr">
+            <a:noAutofit/>
+          </a:bodyPr>
+          <a:lstStyle/>
+          <a:p>
+            <a:pPr algn="l">
+              <a:lnSpc>
+                <a:spcPct val="115000"/>
+              </a:lnSpc>
+            </a:pPr>
+            <a:r>
+              <a:rPr sz="900" b="1" i="0" spc="250">
+                <a:solidFill>
+                  <a:srgbClr val="8E8780"/>
+                </a:solidFill>
+              </a:rPr>
+              <a:t>FIRST BIRTHDAY</a:t>
+            </a:r>
+          </a:p>
+        </p:txBody>
+      </p:sp>
+      <p:sp>
+        <p:nvSpPr>
+          <p:cNvPr id="5" name="포인트"/>
           <p:cNvSpPr/>
           <p:nvPr/>
         </p:nvSpPr>
         <p:spPr>
-          <a:xfrm>
-            <a:off x="0" y="6400800"/>
-            <a:ext cx="914400" cy="457200"/>
-          </a:xfrm>
-          <a:prstGeom prst="rtTriangle">
+          <a:xfrm rot="18900000">
+            <a:off x="11167567" y="667512"/>
+            <a:ext cx="310896" cy="310896"/>
+          </a:xfrm>
+          <a:prstGeom prst="teardrop">
             <a:avLst/>
           </a:prstGeom>
           <a:solidFill>
-            <a:srgbClr val="9DBF5A"/>
+            <a:srgbClr val="D9F2A6"/>
           </a:solidFill>
           <a:ln>
             <a:noFill/>
@@ -3542,8 +3676,8 @@
         </p:nvSpPr>
         <p:spPr>
           <a:xfrm>
-            <a:off x="640080" y="457200"/>
-            <a:ext cx="9722815" cy="868680"/>
+            <a:off x="868680" y="566928"/>
+            <a:ext cx="9448495" cy="868680"/>
           </a:xfrm>
         </p:spPr>
         <p:txBody>
@@ -3560,7 +3694,7 @@
             <a:r>
               <a:rPr sz="3000" b="1" i="0">
                 <a:solidFill>
-                  <a:srgbClr val="526728"/>
+                  <a:srgbClr val="26231F"/>
                 </a:solidFill>
               </a:rPr>
               <a:t>우리 아기를 소개합니다</a:t>
@@ -3570,14 +3704,14 @@
       </p:sp>
       <p:sp>
         <p:nvSpPr>
-          <p:cNvPr id="5" name="사진 자리"/>
+          <p:cNvPr id="6" name="사진 자리"/>
           <p:cNvSpPr/>
           <p:nvPr/>
         </p:nvSpPr>
         <p:spPr>
           <a:xfrm>
-            <a:off x="640080" y="1600200"/>
-            <a:ext cx="3840480" cy="4617720"/>
+            <a:off x="640080" y="1783080"/>
+            <a:ext cx="3840480" cy="4389120"/>
           </a:xfrm>
           <a:prstGeom prst="roundRect">
             <a:avLst>
@@ -3585,12 +3719,10 @@
             </a:avLst>
           </a:prstGeom>
           <a:solidFill>
-            <a:srgbClr val="EBF7D4"/>
+            <a:srgbClr val="ECFAD1"/>
           </a:solidFill>
           <a:ln w="19050">
-            <a:solidFill>
-              <a:srgbClr val="9DBF5A"/>
-            </a:solidFill>
+            <a:noFill/>
             <a:prstDash val="dash"/>
           </a:ln>
         </p:spPr>
@@ -3608,7 +3740,7 @@
             <a:r>
               <a:rPr sz="1400" b="0" i="0">
                 <a:solidFill>
-                  <a:srgbClr val="526728"/>
+                  <a:srgbClr val="8E8780"/>
                 </a:solidFill>
               </a:rPr>
               <a:t>아기 사진을 넣어 주세요</a:t>
@@ -3618,14 +3750,14 @@
       </p:sp>
       <p:graphicFrame>
         <p:nvGraphicFramePr>
-          <p:cNvPr id="6" name="표"/>
+          <p:cNvPr id="7" name="표"/>
           <p:cNvGraphicFramePr>
             <a:graphicFrameLocks noGrp="1"/>
           </p:cNvGraphicFramePr>
           <p:nvPr/>
         </p:nvGraphicFramePr>
         <p:xfrm>
-          <a:off x="4846320" y="1600200"/>
+          <a:off x="4846320" y="1783080"/>
           <a:ext cx="6705295" cy="3950208"/>
         </p:xfrm>
         <a:graphic>
@@ -3648,7 +3780,7 @@
                       <a:r>
                         <a:rPr sz="1500" b="1">
                           <a:solidFill>
-                            <a:srgbClr val="526728"/>
+                            <a:srgbClr val="3E4927"/>
                           </a:solidFill>
                         </a:rPr>
                         <a:t>이름</a:t>
@@ -3658,30 +3790,30 @@
                   <a:tcPr anchor="ctr" marL="73152" marR="73152">
                     <a:lnL w="9525" cap="flat" cmpd="sng" algn="ctr">
                       <a:solidFill>
-                        <a:srgbClr val="EBF7D4"/>
+                        <a:srgbClr val="ECFAD1"/>
                       </a:solidFill>
                       <a:prstDash val="solid"/>
                     </a:lnL>
                     <a:lnR w="9525" cap="flat" cmpd="sng" algn="ctr">
                       <a:solidFill>
-                        <a:srgbClr val="EBF7D4"/>
+                        <a:srgbClr val="ECFAD1"/>
                       </a:solidFill>
                       <a:prstDash val="solid"/>
                     </a:lnR>
                     <a:lnT w="9525" cap="flat" cmpd="sng" algn="ctr">
                       <a:solidFill>
-                        <a:srgbClr val="EBF7D4"/>
+                        <a:srgbClr val="ECFAD1"/>
                       </a:solidFill>
                       <a:prstDash val="solid"/>
                     </a:lnT>
                     <a:lnB w="9525" cap="flat" cmpd="sng" algn="ctr">
                       <a:solidFill>
-                        <a:srgbClr val="EBF7D4"/>
+                        <a:srgbClr val="ECFAD1"/>
                       </a:solidFill>
                       <a:prstDash val="solid"/>
                     </a:lnB>
                     <a:solidFill>
-                      <a:srgbClr val="EBF7D4"/>
+                      <a:srgbClr val="ECFAD1"/>
                     </a:solidFill>
                   </a:tcPr>
                 </a:tc>
@@ -3694,7 +3826,7 @@
                       <a:r>
                         <a:rPr sz="1500" b="0">
                           <a:solidFill>
-                            <a:srgbClr val="2B2B2B"/>
+                            <a:srgbClr val="26231F"/>
                           </a:solidFill>
                         </a:rPr>
                         <a:t>입력하세요</a:t>
@@ -3704,30 +3836,30 @@
                   <a:tcPr anchor="ctr" marL="73152" marR="73152">
                     <a:lnL w="9525" cap="flat" cmpd="sng" algn="ctr">
                       <a:solidFill>
-                        <a:srgbClr val="EBF7D4"/>
+                        <a:srgbClr val="ECFAD1"/>
                       </a:solidFill>
                       <a:prstDash val="solid"/>
                     </a:lnL>
                     <a:lnR w="9525" cap="flat" cmpd="sng" algn="ctr">
                       <a:solidFill>
-                        <a:srgbClr val="EBF7D4"/>
+                        <a:srgbClr val="ECFAD1"/>
                       </a:solidFill>
                       <a:prstDash val="solid"/>
                     </a:lnR>
                     <a:lnT w="9525" cap="flat" cmpd="sng" algn="ctr">
                       <a:solidFill>
-                        <a:srgbClr val="EBF7D4"/>
+                        <a:srgbClr val="ECFAD1"/>
                       </a:solidFill>
                       <a:prstDash val="solid"/>
                     </a:lnT>
                     <a:lnB w="9525" cap="flat" cmpd="sng" algn="ctr">
                       <a:solidFill>
-                        <a:srgbClr val="EBF7D4"/>
+                        <a:srgbClr val="ECFAD1"/>
                       </a:solidFill>
                       <a:prstDash val="solid"/>
                     </a:lnB>
                     <a:solidFill>
-                      <a:srgbClr val="F9FCF3"/>
+                      <a:srgbClr val="F7FDEA"/>
                     </a:solidFill>
                   </a:tcPr>
                 </a:tc>
@@ -3742,7 +3874,7 @@
                       <a:r>
                         <a:rPr sz="1500" b="1">
                           <a:solidFill>
-                            <a:srgbClr val="526728"/>
+                            <a:srgbClr val="3E4927"/>
                           </a:solidFill>
                         </a:rPr>
                         <a:t>생일</a:t>
@@ -3752,30 +3884,30 @@
                   <a:tcPr anchor="ctr" marL="73152" marR="73152">
                     <a:lnL w="9525" cap="flat" cmpd="sng" algn="ctr">
                       <a:solidFill>
-                        <a:srgbClr val="EBF7D4"/>
+                        <a:srgbClr val="ECFAD1"/>
                       </a:solidFill>
                       <a:prstDash val="solid"/>
                     </a:lnL>
                     <a:lnR w="9525" cap="flat" cmpd="sng" algn="ctr">
                       <a:solidFill>
-                        <a:srgbClr val="EBF7D4"/>
+                        <a:srgbClr val="ECFAD1"/>
                       </a:solidFill>
                       <a:prstDash val="solid"/>
                     </a:lnR>
                     <a:lnT w="9525" cap="flat" cmpd="sng" algn="ctr">
                       <a:solidFill>
-                        <a:srgbClr val="EBF7D4"/>
+                        <a:srgbClr val="ECFAD1"/>
                       </a:solidFill>
                       <a:prstDash val="solid"/>
                     </a:lnT>
                     <a:lnB w="9525" cap="flat" cmpd="sng" algn="ctr">
                       <a:solidFill>
-                        <a:srgbClr val="EBF7D4"/>
+                        <a:srgbClr val="ECFAD1"/>
                       </a:solidFill>
                       <a:prstDash val="solid"/>
                     </a:lnB>
                     <a:solidFill>
-                      <a:srgbClr val="EBF7D4"/>
+                      <a:srgbClr val="ECFAD1"/>
                     </a:solidFill>
                   </a:tcPr>
                 </a:tc>
@@ -3788,7 +3920,7 @@
                       <a:r>
                         <a:rPr sz="1500" b="0">
                           <a:solidFill>
-                            <a:srgbClr val="2B2B2B"/>
+                            <a:srgbClr val="26231F"/>
                           </a:solidFill>
                         </a:rPr>
                         <a:t>입력하세요</a:t>
@@ -3798,25 +3930,25 @@
                   <a:tcPr anchor="ctr" marL="73152" marR="73152">
                     <a:lnL w="9525" cap="flat" cmpd="sng" algn="ctr">
                       <a:solidFill>
-                        <a:srgbClr val="EBF7D4"/>
+                        <a:srgbClr val="ECFAD1"/>
                       </a:solidFill>
                       <a:prstDash val="solid"/>
                     </a:lnL>
                     <a:lnR w="9525" cap="flat" cmpd="sng" algn="ctr">
                       <a:solidFill>
-                        <a:srgbClr val="EBF7D4"/>
+                        <a:srgbClr val="ECFAD1"/>
                       </a:solidFill>
                       <a:prstDash val="solid"/>
                     </a:lnR>
                     <a:lnT w="9525" cap="flat" cmpd="sng" algn="ctr">
                       <a:solidFill>
-                        <a:srgbClr val="EBF7D4"/>
+                        <a:srgbClr val="ECFAD1"/>
                       </a:solidFill>
                       <a:prstDash val="solid"/>
                     </a:lnT>
                     <a:lnB w="9525" cap="flat" cmpd="sng" algn="ctr">
                       <a:solidFill>
-                        <a:srgbClr val="EBF7D4"/>
+                        <a:srgbClr val="ECFAD1"/>
                       </a:solidFill>
                       <a:prstDash val="solid"/>
                     </a:lnB>
@@ -3836,7 +3968,7 @@
                       <a:r>
                         <a:rPr sz="1500" b="1">
                           <a:solidFill>
-                            <a:srgbClr val="526728"/>
+                            <a:srgbClr val="3E4927"/>
                           </a:solidFill>
                         </a:rPr>
                         <a:t>키 · 몸무게</a:t>
@@ -3846,30 +3978,30 @@
                   <a:tcPr anchor="ctr" marL="73152" marR="73152">
                     <a:lnL w="9525" cap="flat" cmpd="sng" algn="ctr">
                       <a:solidFill>
-                        <a:srgbClr val="EBF7D4"/>
+                        <a:srgbClr val="ECFAD1"/>
                       </a:solidFill>
                       <a:prstDash val="solid"/>
                     </a:lnL>
                     <a:lnR w="9525" cap="flat" cmpd="sng" algn="ctr">
                       <a:solidFill>
-                        <a:srgbClr val="EBF7D4"/>
+                        <a:srgbClr val="ECFAD1"/>
                       </a:solidFill>
                       <a:prstDash val="solid"/>
                     </a:lnR>
                     <a:lnT w="9525" cap="flat" cmpd="sng" algn="ctr">
                       <a:solidFill>
-                        <a:srgbClr val="EBF7D4"/>
+                        <a:srgbClr val="ECFAD1"/>
                       </a:solidFill>
                       <a:prstDash val="solid"/>
                     </a:lnT>
                     <a:lnB w="9525" cap="flat" cmpd="sng" algn="ctr">
                       <a:solidFill>
-                        <a:srgbClr val="EBF7D4"/>
+                        <a:srgbClr val="ECFAD1"/>
                       </a:solidFill>
                       <a:prstDash val="solid"/>
                     </a:lnB>
                     <a:solidFill>
-                      <a:srgbClr val="EBF7D4"/>
+                      <a:srgbClr val="ECFAD1"/>
                     </a:solidFill>
                   </a:tcPr>
                 </a:tc>
@@ -3882,7 +4014,7 @@
                       <a:r>
                         <a:rPr sz="1500" b="0">
                           <a:solidFill>
-                            <a:srgbClr val="2B2B2B"/>
+                            <a:srgbClr val="26231F"/>
                           </a:solidFill>
                         </a:rPr>
                         <a:t>입력하세요</a:t>
@@ -3892,30 +4024,30 @@
                   <a:tcPr anchor="ctr" marL="73152" marR="73152">
                     <a:lnL w="9525" cap="flat" cmpd="sng" algn="ctr">
                       <a:solidFill>
-                        <a:srgbClr val="EBF7D4"/>
+                        <a:srgbClr val="ECFAD1"/>
                       </a:solidFill>
                       <a:prstDash val="solid"/>
                     </a:lnL>
                     <a:lnR w="9525" cap="flat" cmpd="sng" algn="ctr">
                       <a:solidFill>
-                        <a:srgbClr val="EBF7D4"/>
+                        <a:srgbClr val="ECFAD1"/>
                       </a:solidFill>
                       <a:prstDash val="solid"/>
                     </a:lnR>
                     <a:lnT w="9525" cap="flat" cmpd="sng" algn="ctr">
                       <a:solidFill>
-                        <a:srgbClr val="EBF7D4"/>
+                        <a:srgbClr val="ECFAD1"/>
                       </a:solidFill>
                       <a:prstDash val="solid"/>
                     </a:lnT>
                     <a:lnB w="9525" cap="flat" cmpd="sng" algn="ctr">
                       <a:solidFill>
-                        <a:srgbClr val="EBF7D4"/>
+                        <a:srgbClr val="ECFAD1"/>
                       </a:solidFill>
                       <a:prstDash val="solid"/>
                     </a:lnB>
                     <a:solidFill>
-                      <a:srgbClr val="F9FCF3"/>
+                      <a:srgbClr val="F7FDEA"/>
                     </a:solidFill>
                   </a:tcPr>
                 </a:tc>
@@ -3930,7 +4062,7 @@
                       <a:r>
                         <a:rPr sz="1500" b="1">
                           <a:solidFill>
-                            <a:srgbClr val="526728"/>
+                            <a:srgbClr val="3E4927"/>
                           </a:solidFill>
                         </a:rPr>
                         <a:t>좋아하는 것</a:t>
@@ -3940,30 +4072,30 @@
                   <a:tcPr anchor="ctr" marL="73152" marR="73152">
                     <a:lnL w="9525" cap="flat" cmpd="sng" algn="ctr">
                       <a:solidFill>
-                        <a:srgbClr val="EBF7D4"/>
+                        <a:srgbClr val="ECFAD1"/>
                       </a:solidFill>
                       <a:prstDash val="solid"/>
                     </a:lnL>
                     <a:lnR w="9525" cap="flat" cmpd="sng" algn="ctr">
                       <a:solidFill>
-                        <a:srgbClr val="EBF7D4"/>
+                        <a:srgbClr val="ECFAD1"/>
                       </a:solidFill>
                       <a:prstDash val="solid"/>
                     </a:lnR>
                     <a:lnT w="9525" cap="flat" cmpd="sng" algn="ctr">
                       <a:solidFill>
-                        <a:srgbClr val="EBF7D4"/>
+                        <a:srgbClr val="ECFAD1"/>
                       </a:solidFill>
                       <a:prstDash val="solid"/>
                     </a:lnT>
                     <a:lnB w="9525" cap="flat" cmpd="sng" algn="ctr">
                       <a:solidFill>
-                        <a:srgbClr val="EBF7D4"/>
+                        <a:srgbClr val="ECFAD1"/>
                       </a:solidFill>
                       <a:prstDash val="solid"/>
                     </a:lnB>
                     <a:solidFill>
-                      <a:srgbClr val="EBF7D4"/>
+                      <a:srgbClr val="ECFAD1"/>
                     </a:solidFill>
                   </a:tcPr>
                 </a:tc>
@@ -3976,7 +4108,7 @@
                       <a:r>
                         <a:rPr sz="1500" b="0">
                           <a:solidFill>
-                            <a:srgbClr val="2B2B2B"/>
+                            <a:srgbClr val="26231F"/>
                           </a:solidFill>
                         </a:rPr>
                         <a:t>입력하세요</a:t>
@@ -3986,25 +4118,25 @@
                   <a:tcPr anchor="ctr" marL="73152" marR="73152">
                     <a:lnL w="9525" cap="flat" cmpd="sng" algn="ctr">
                       <a:solidFill>
-                        <a:srgbClr val="EBF7D4"/>
+                        <a:srgbClr val="ECFAD1"/>
                       </a:solidFill>
                       <a:prstDash val="solid"/>
                     </a:lnL>
                     <a:lnR w="9525" cap="flat" cmpd="sng" algn="ctr">
                       <a:solidFill>
-                        <a:srgbClr val="EBF7D4"/>
+                        <a:srgbClr val="ECFAD1"/>
                       </a:solidFill>
                       <a:prstDash val="solid"/>
                     </a:lnR>
                     <a:lnT w="9525" cap="flat" cmpd="sng" algn="ctr">
                       <a:solidFill>
-                        <a:srgbClr val="EBF7D4"/>
+                        <a:srgbClr val="ECFAD1"/>
                       </a:solidFill>
                       <a:prstDash val="solid"/>
                     </a:lnT>
                     <a:lnB w="9525" cap="flat" cmpd="sng" algn="ctr">
                       <a:solidFill>
-                        <a:srgbClr val="EBF7D4"/>
+                        <a:srgbClr val="ECFAD1"/>
                       </a:solidFill>
                       <a:prstDash val="solid"/>
                     </a:lnB>
@@ -4024,7 +4156,7 @@
                       <a:r>
                         <a:rPr sz="1500" b="1">
                           <a:solidFill>
-                            <a:srgbClr val="526728"/>
+                            <a:srgbClr val="3E4927"/>
                           </a:solidFill>
                         </a:rPr>
                         <a:t>별명</a:t>
@@ -4034,30 +4166,30 @@
                   <a:tcPr anchor="ctr" marL="73152" marR="73152">
                     <a:lnL w="9525" cap="flat" cmpd="sng" algn="ctr">
                       <a:solidFill>
-                        <a:srgbClr val="EBF7D4"/>
+                        <a:srgbClr val="ECFAD1"/>
                       </a:solidFill>
                       <a:prstDash val="solid"/>
                     </a:lnL>
                     <a:lnR w="9525" cap="flat" cmpd="sng" algn="ctr">
                       <a:solidFill>
-                        <a:srgbClr val="EBF7D4"/>
+                        <a:srgbClr val="ECFAD1"/>
                       </a:solidFill>
                       <a:prstDash val="solid"/>
                     </a:lnR>
                     <a:lnT w="9525" cap="flat" cmpd="sng" algn="ctr">
                       <a:solidFill>
-                        <a:srgbClr val="EBF7D4"/>
+                        <a:srgbClr val="ECFAD1"/>
                       </a:solidFill>
                       <a:prstDash val="solid"/>
                     </a:lnT>
                     <a:lnB w="9525" cap="flat" cmpd="sng" algn="ctr">
                       <a:solidFill>
-                        <a:srgbClr val="EBF7D4"/>
+                        <a:srgbClr val="ECFAD1"/>
                       </a:solidFill>
                       <a:prstDash val="solid"/>
                     </a:lnB>
                     <a:solidFill>
-                      <a:srgbClr val="EBF7D4"/>
+                      <a:srgbClr val="ECFAD1"/>
                     </a:solidFill>
                   </a:tcPr>
                 </a:tc>
@@ -4070,7 +4202,7 @@
                       <a:r>
                         <a:rPr sz="1500" b="0">
                           <a:solidFill>
-                            <a:srgbClr val="2B2B2B"/>
+                            <a:srgbClr val="26231F"/>
                           </a:solidFill>
                         </a:rPr>
                         <a:t>입력하세요</a:t>
@@ -4080,30 +4212,30 @@
                   <a:tcPr anchor="ctr" marL="73152" marR="73152">
                     <a:lnL w="9525" cap="flat" cmpd="sng" algn="ctr">
                       <a:solidFill>
-                        <a:srgbClr val="EBF7D4"/>
+                        <a:srgbClr val="ECFAD1"/>
                       </a:solidFill>
                       <a:prstDash val="solid"/>
                     </a:lnL>
                     <a:lnR w="9525" cap="flat" cmpd="sng" algn="ctr">
                       <a:solidFill>
-                        <a:srgbClr val="EBF7D4"/>
+                        <a:srgbClr val="ECFAD1"/>
                       </a:solidFill>
                       <a:prstDash val="solid"/>
                     </a:lnR>
                     <a:lnT w="9525" cap="flat" cmpd="sng" algn="ctr">
                       <a:solidFill>
-                        <a:srgbClr val="EBF7D4"/>
+                        <a:srgbClr val="ECFAD1"/>
                       </a:solidFill>
                       <a:prstDash val="solid"/>
                     </a:lnT>
                     <a:lnB w="9525" cap="flat" cmpd="sng" algn="ctr">
                       <a:solidFill>
-                        <a:srgbClr val="EBF7D4"/>
+                        <a:srgbClr val="ECFAD1"/>
                       </a:solidFill>
                       <a:prstDash val="solid"/>
                     </a:lnB>
                     <a:solidFill>
-                      <a:srgbClr val="F9FCF3"/>
+                      <a:srgbClr val="F7FDEA"/>
                     </a:solidFill>
                   </a:tcPr>
                 </a:tc>
@@ -4118,7 +4250,7 @@
                       <a:r>
                         <a:rPr sz="1500" b="1">
                           <a:solidFill>
-                            <a:srgbClr val="526728"/>
+                            <a:srgbClr val="3E4927"/>
                           </a:solidFill>
                         </a:rPr>
                         <a:t>부모의 마음</a:t>
@@ -4128,30 +4260,30 @@
                   <a:tcPr anchor="ctr" marL="73152" marR="73152">
                     <a:lnL w="9525" cap="flat" cmpd="sng" algn="ctr">
                       <a:solidFill>
-                        <a:srgbClr val="EBF7D4"/>
+                        <a:srgbClr val="ECFAD1"/>
                       </a:solidFill>
                       <a:prstDash val="solid"/>
                     </a:lnL>
                     <a:lnR w="9525" cap="flat" cmpd="sng" algn="ctr">
                       <a:solidFill>
-                        <a:srgbClr val="EBF7D4"/>
+                        <a:srgbClr val="ECFAD1"/>
                       </a:solidFill>
                       <a:prstDash val="solid"/>
                     </a:lnR>
                     <a:lnT w="9525" cap="flat" cmpd="sng" algn="ctr">
                       <a:solidFill>
-                        <a:srgbClr val="EBF7D4"/>
+                        <a:srgbClr val="ECFAD1"/>
                       </a:solidFill>
                       <a:prstDash val="solid"/>
                     </a:lnT>
                     <a:lnB w="9525" cap="flat" cmpd="sng" algn="ctr">
                       <a:solidFill>
-                        <a:srgbClr val="EBF7D4"/>
+                        <a:srgbClr val="ECFAD1"/>
                       </a:solidFill>
                       <a:prstDash val="solid"/>
                     </a:lnB>
                     <a:solidFill>
-                      <a:srgbClr val="EBF7D4"/>
+                      <a:srgbClr val="ECFAD1"/>
                     </a:solidFill>
                   </a:tcPr>
                 </a:tc>
@@ -4164,7 +4296,7 @@
                       <a:r>
                         <a:rPr sz="1500" b="0">
                           <a:solidFill>
-                            <a:srgbClr val="2B2B2B"/>
+                            <a:srgbClr val="26231F"/>
                           </a:solidFill>
                         </a:rPr>
                         <a:t>입력하세요</a:t>
@@ -4174,25 +4306,25 @@
                   <a:tcPr anchor="ctr" marL="73152" marR="73152">
                     <a:lnL w="9525" cap="flat" cmpd="sng" algn="ctr">
                       <a:solidFill>
-                        <a:srgbClr val="EBF7D4"/>
+                        <a:srgbClr val="ECFAD1"/>
                       </a:solidFill>
                       <a:prstDash val="solid"/>
                     </a:lnL>
                     <a:lnR w="9525" cap="flat" cmpd="sng" algn="ctr">
                       <a:solidFill>
-                        <a:srgbClr val="EBF7D4"/>
+                        <a:srgbClr val="ECFAD1"/>
                       </a:solidFill>
                       <a:prstDash val="solid"/>
                     </a:lnR>
                     <a:lnT w="9525" cap="flat" cmpd="sng" algn="ctr">
                       <a:solidFill>
-                        <a:srgbClr val="EBF7D4"/>
+                        <a:srgbClr val="ECFAD1"/>
                       </a:solidFill>
                       <a:prstDash val="solid"/>
                     </a:lnT>
                     <a:lnB w="9525" cap="flat" cmpd="sng" algn="ctr">
                       <a:solidFill>
-                        <a:srgbClr val="EBF7D4"/>
+                        <a:srgbClr val="ECFAD1"/>
                       </a:solidFill>
                       <a:prstDash val="solid"/>
                     </a:lnB>
@@ -4220,7 +4352,7 @@
     <p:bg>
       <p:bgPr>
         <a:solidFill>
-          <a:srgbClr val="F9FCF3"/>
+          <a:srgbClr val="FCFDFA"/>
         </a:solidFill>
         <a:effectLst/>
       </p:bgPr>
@@ -4240,14 +4372,16 @@
         </p:nvSpPr>
         <p:spPr>
           <a:xfrm>
-            <a:off x="0" y="6035040"/>
-            <a:ext cx="1737360" cy="822960"/>
-          </a:xfrm>
-          <a:prstGeom prst="rtTriangle">
-            <a:avLst/>
+            <a:off x="640080" y="566928"/>
+            <a:ext cx="64008" cy="868680"/>
+          </a:xfrm>
+          <a:prstGeom prst="roundRect">
+            <a:avLst>
+              <a:gd name="adj" fmla="val 50000"/>
+            </a:avLst>
           </a:prstGeom>
           <a:solidFill>
-            <a:srgbClr val="EBF7D4"/>
+            <a:srgbClr val="D0ED97"/>
           </a:solidFill>
           <a:ln>
             <a:noFill/>
@@ -4263,20 +4397,58 @@
       </p:sp>
       <p:sp>
         <p:nvSpPr>
-          <p:cNvPr id="4" name="장식"/>
+          <p:cNvPr id="4" name="상단 라벨"/>
+          <p:cNvSpPr txBox="1"/>
+          <p:nvPr/>
+        </p:nvSpPr>
+        <p:spPr>
+          <a:xfrm>
+            <a:off x="868680" y="274320"/>
+            <a:ext cx="5486400" cy="274320"/>
+          </a:xfrm>
+          <a:prstGeom prst="rect">
+            <a:avLst/>
+          </a:prstGeom>
+          <a:noFill/>
+        </p:spPr>
+        <p:txBody>
+          <a:bodyPr wrap="square" lIns="54864" rIns="54864" tIns="27432" bIns="27432" anchor="ctr">
+            <a:noAutofit/>
+          </a:bodyPr>
+          <a:lstStyle/>
+          <a:p>
+            <a:pPr algn="l">
+              <a:lnSpc>
+                <a:spcPct val="115000"/>
+              </a:lnSpc>
+            </a:pPr>
+            <a:r>
+              <a:rPr sz="900" b="1" i="0" spc="250">
+                <a:solidFill>
+                  <a:srgbClr val="8E8780"/>
+                </a:solidFill>
+              </a:rPr>
+              <a:t>FIRST BIRTHDAY</a:t>
+            </a:r>
+          </a:p>
+        </p:txBody>
+      </p:sp>
+      <p:sp>
+        <p:nvSpPr>
+          <p:cNvPr id="5" name="포인트"/>
           <p:cNvSpPr/>
           <p:nvPr/>
         </p:nvSpPr>
         <p:spPr>
-          <a:xfrm>
-            <a:off x="0" y="6400800"/>
-            <a:ext cx="914400" cy="457200"/>
-          </a:xfrm>
-          <a:prstGeom prst="rtTriangle">
+          <a:xfrm rot="18900000">
+            <a:off x="11167567" y="667512"/>
+            <a:ext cx="310896" cy="310896"/>
+          </a:xfrm>
+          <a:prstGeom prst="teardrop">
             <a:avLst/>
           </a:prstGeom>
           <a:solidFill>
-            <a:srgbClr val="9DBF5A"/>
+            <a:srgbClr val="D9F2A6"/>
           </a:solidFill>
           <a:ln>
             <a:noFill/>
@@ -4302,8 +4474,8 @@
         </p:nvSpPr>
         <p:spPr>
           <a:xfrm>
-            <a:off x="640080" y="457200"/>
-            <a:ext cx="9722815" cy="868680"/>
+            <a:off x="868680" y="566928"/>
+            <a:ext cx="9448495" cy="868680"/>
           </a:xfrm>
         </p:spPr>
         <p:txBody>
@@ -4320,7 +4492,7 @@
             <a:r>
               <a:rPr sz="3000" b="1" i="0">
                 <a:solidFill>
-                  <a:srgbClr val="526728"/>
+                  <a:srgbClr val="26231F"/>
                 </a:solidFill>
               </a:rPr>
               <a:t>돌잡이 이야기</a:t>
@@ -4330,27 +4502,25 @@
       </p:sp>
       <p:sp>
         <p:nvSpPr>
-          <p:cNvPr id="5" name="카드 1"/>
+          <p:cNvPr id="6" name="카드 1"/>
           <p:cNvSpPr/>
           <p:nvPr/>
         </p:nvSpPr>
         <p:spPr>
           <a:xfrm>
-            <a:off x="640080" y="1600200"/>
-            <a:ext cx="2556433" cy="4800600"/>
+            <a:off x="640080" y="1783080"/>
+            <a:ext cx="2556433" cy="4572000"/>
           </a:xfrm>
           <a:prstGeom prst="roundRect">
             <a:avLst>
-              <a:gd name="adj" fmla="val 8000"/>
+              <a:gd name="adj" fmla="val 7000"/>
             </a:avLst>
           </a:prstGeom>
           <a:solidFill>
-            <a:srgbClr val="F9FCF3"/>
+            <a:srgbClr val="F7FDEA"/>
           </a:solidFill>
-          <a:ln w="15875">
-            <a:solidFill>
-              <a:srgbClr val="EBF7D4"/>
-            </a:solidFill>
+          <a:ln>
+            <a:noFill/>
           </a:ln>
         </p:spPr>
         <p:txBody>
@@ -4363,23 +4533,23 @@
       </p:sp>
       <p:sp>
         <p:nvSpPr>
-          <p:cNvPr id="6" name="번호 1"/>
+          <p:cNvPr id="7" name="번호 1"/>
           <p:cNvSpPr/>
           <p:nvPr/>
         </p:nvSpPr>
         <p:spPr>
           <a:xfrm>
-            <a:off x="822959" y="1783080"/>
+            <a:off x="822959" y="1965960"/>
             <a:ext cx="457200" cy="457200"/>
           </a:xfrm>
           <a:prstGeom prst="ellipse">
             <a:avLst/>
           </a:prstGeom>
-          <a:solidFill>
-            <a:srgbClr val="9DBF5A"/>
-          </a:solidFill>
-          <a:ln>
-            <a:noFill/>
+          <a:noFill/>
+          <a:ln w="19050">
+            <a:solidFill>
+              <a:srgbClr val="D0ED97"/>
+            </a:solidFill>
           </a:ln>
         </p:spPr>
         <p:txBody>
@@ -4396,7 +4566,7 @@
             <a:r>
               <a:rPr sz="1600" b="1" i="0">
                 <a:solidFill>
-                  <a:srgbClr val="FFFFFF"/>
+                  <a:srgbClr val="3E4927"/>
                 </a:solidFill>
               </a:rPr>
               <a:t>1</a:t>
@@ -4406,13 +4576,13 @@
       </p:sp>
       <p:sp>
         <p:nvSpPr>
-          <p:cNvPr id="7" name="TextBox 6"/>
+          <p:cNvPr id="8" name="TextBox 7"/>
           <p:cNvSpPr txBox="1"/>
           <p:nvPr/>
         </p:nvSpPr>
         <p:spPr>
           <a:xfrm>
-            <a:off x="777240" y="2377440"/>
+            <a:off x="777240" y="2560320"/>
             <a:ext cx="2282113" cy="640080"/>
           </a:xfrm>
           <a:prstGeom prst="rect">
@@ -4434,7 +4604,7 @@
             <a:r>
               <a:rPr sz="1600" b="1" i="0">
                 <a:solidFill>
-                  <a:srgbClr val="526728"/>
+                  <a:srgbClr val="3E4927"/>
                 </a:solidFill>
               </a:rPr>
               <a:t>연필 · 공부</a:t>
@@ -4444,14 +4614,14 @@
       </p:sp>
       <p:sp>
         <p:nvSpPr>
-          <p:cNvPr id="8" name="TextBox 7"/>
+          <p:cNvPr id="9" name="TextBox 8"/>
           <p:cNvSpPr txBox="1"/>
           <p:nvPr/>
         </p:nvSpPr>
         <p:spPr>
           <a:xfrm>
-            <a:off x="777240" y="3063240"/>
-            <a:ext cx="2282113" cy="3200400"/>
+            <a:off x="777240" y="3246120"/>
+            <a:ext cx="2282113" cy="2971800"/>
           </a:xfrm>
           <a:prstGeom prst="rect">
             <a:avLst/>
@@ -4472,7 +4642,7 @@
             <a:r>
               <a:rPr sz="1400" b="0" i="0">
                 <a:solidFill>
-                  <a:srgbClr val="2B2B2B"/>
+                  <a:srgbClr val="26231F"/>
                 </a:solidFill>
               </a:rPr>
               <a:t>학문과 총명을 바라는 마음</a:t>
@@ -4482,27 +4652,25 @@
       </p:sp>
       <p:sp>
         <p:nvSpPr>
-          <p:cNvPr id="9" name="카드 2"/>
+          <p:cNvPr id="10" name="카드 2"/>
           <p:cNvSpPr/>
           <p:nvPr/>
         </p:nvSpPr>
         <p:spPr>
           <a:xfrm>
-            <a:off x="3425113" y="1600200"/>
-            <a:ext cx="2556433" cy="4800600"/>
+            <a:off x="3425113" y="1783080"/>
+            <a:ext cx="2556433" cy="4572000"/>
           </a:xfrm>
           <a:prstGeom prst="roundRect">
             <a:avLst>
-              <a:gd name="adj" fmla="val 8000"/>
+              <a:gd name="adj" fmla="val 7000"/>
             </a:avLst>
           </a:prstGeom>
           <a:solidFill>
-            <a:srgbClr val="F9FCF3"/>
+            <a:srgbClr val="F7FDEA"/>
           </a:solidFill>
-          <a:ln w="15875">
-            <a:solidFill>
-              <a:srgbClr val="EBF7D4"/>
-            </a:solidFill>
+          <a:ln>
+            <a:noFill/>
           </a:ln>
         </p:spPr>
         <p:txBody>
@@ -4515,23 +4683,23 @@
       </p:sp>
       <p:sp>
         <p:nvSpPr>
-          <p:cNvPr id="10" name="번호 2"/>
+          <p:cNvPr id="11" name="번호 2"/>
           <p:cNvSpPr/>
           <p:nvPr/>
         </p:nvSpPr>
         <p:spPr>
           <a:xfrm>
-            <a:off x="3607993" y="1783080"/>
+            <a:off x="3607993" y="1965960"/>
             <a:ext cx="457200" cy="457200"/>
           </a:xfrm>
           <a:prstGeom prst="ellipse">
             <a:avLst/>
           </a:prstGeom>
-          <a:solidFill>
-            <a:srgbClr val="9DBF5A"/>
-          </a:solidFill>
-          <a:ln>
-            <a:noFill/>
+          <a:noFill/>
+          <a:ln w="19050">
+            <a:solidFill>
+              <a:srgbClr val="D0ED97"/>
+            </a:solidFill>
           </a:ln>
         </p:spPr>
         <p:txBody>
@@ -4548,7 +4716,7 @@
             <a:r>
               <a:rPr sz="1600" b="1" i="0">
                 <a:solidFill>
-                  <a:srgbClr val="FFFFFF"/>
+                  <a:srgbClr val="3E4927"/>
                 </a:solidFill>
               </a:rPr>
               <a:t>2</a:t>
@@ -4558,13 +4726,13 @@
       </p:sp>
       <p:sp>
         <p:nvSpPr>
-          <p:cNvPr id="11" name="TextBox 10"/>
+          <p:cNvPr id="12" name="TextBox 11"/>
           <p:cNvSpPr txBox="1"/>
           <p:nvPr/>
         </p:nvSpPr>
         <p:spPr>
           <a:xfrm>
-            <a:off x="3562273" y="2377440"/>
+            <a:off x="3562273" y="2560320"/>
             <a:ext cx="2282113" cy="640080"/>
           </a:xfrm>
           <a:prstGeom prst="rect">
@@ -4586,7 +4754,7 @@
             <a:r>
               <a:rPr sz="1600" b="1" i="0">
                 <a:solidFill>
-                  <a:srgbClr val="526728"/>
+                  <a:srgbClr val="3E4927"/>
                 </a:solidFill>
               </a:rPr>
               <a:t>실 · 장수</a:t>
@@ -4596,14 +4764,14 @@
       </p:sp>
       <p:sp>
         <p:nvSpPr>
-          <p:cNvPr id="12" name="TextBox 11"/>
+          <p:cNvPr id="13" name="TextBox 12"/>
           <p:cNvSpPr txBox="1"/>
           <p:nvPr/>
         </p:nvSpPr>
         <p:spPr>
           <a:xfrm>
-            <a:off x="3562273" y="3063240"/>
-            <a:ext cx="2282113" cy="3200400"/>
+            <a:off x="3562273" y="3246120"/>
+            <a:ext cx="2282113" cy="2971800"/>
           </a:xfrm>
           <a:prstGeom prst="rect">
             <a:avLst/>
@@ -4624,7 +4792,7 @@
             <a:r>
               <a:rPr sz="1400" b="0" i="0">
                 <a:solidFill>
-                  <a:srgbClr val="2B2B2B"/>
+                  <a:srgbClr val="26231F"/>
                 </a:solidFill>
               </a:rPr>
               <a:t>건강하고 오래 살기를</a:t>
@@ -4634,27 +4802,25 @@
       </p:sp>
       <p:sp>
         <p:nvSpPr>
-          <p:cNvPr id="13" name="카드 3"/>
+          <p:cNvPr id="14" name="카드 3"/>
           <p:cNvSpPr/>
           <p:nvPr/>
         </p:nvSpPr>
         <p:spPr>
           <a:xfrm>
-            <a:off x="6210147" y="1600200"/>
-            <a:ext cx="2556433" cy="4800600"/>
+            <a:off x="6210147" y="1783080"/>
+            <a:ext cx="2556433" cy="4572000"/>
           </a:xfrm>
           <a:prstGeom prst="roundRect">
             <a:avLst>
-              <a:gd name="adj" fmla="val 8000"/>
+              <a:gd name="adj" fmla="val 7000"/>
             </a:avLst>
           </a:prstGeom>
           <a:solidFill>
-            <a:srgbClr val="F9FCF3"/>
+            <a:srgbClr val="F7FDEA"/>
           </a:solidFill>
-          <a:ln w="15875">
-            <a:solidFill>
-              <a:srgbClr val="EBF7D4"/>
-            </a:solidFill>
+          <a:ln>
+            <a:noFill/>
           </a:ln>
         </p:spPr>
         <p:txBody>
@@ -4667,23 +4833,23 @@
       </p:sp>
       <p:sp>
         <p:nvSpPr>
-          <p:cNvPr id="14" name="번호 3"/>
+          <p:cNvPr id="15" name="번호 3"/>
           <p:cNvSpPr/>
           <p:nvPr/>
         </p:nvSpPr>
         <p:spPr>
           <a:xfrm>
-            <a:off x="6393027" y="1783080"/>
+            <a:off x="6393027" y="1965960"/>
             <a:ext cx="457200" cy="457200"/>
           </a:xfrm>
           <a:prstGeom prst="ellipse">
             <a:avLst/>
           </a:prstGeom>
-          <a:solidFill>
-            <a:srgbClr val="9DBF5A"/>
-          </a:solidFill>
-          <a:ln>
-            <a:noFill/>
+          <a:noFill/>
+          <a:ln w="19050">
+            <a:solidFill>
+              <a:srgbClr val="D0ED97"/>
+            </a:solidFill>
           </a:ln>
         </p:spPr>
         <p:txBody>
@@ -4700,7 +4866,7 @@
             <a:r>
               <a:rPr sz="1600" b="1" i="0">
                 <a:solidFill>
-                  <a:srgbClr val="FFFFFF"/>
+                  <a:srgbClr val="3E4927"/>
                 </a:solidFill>
               </a:rPr>
               <a:t>3</a:t>
@@ -4710,13 +4876,13 @@
       </p:sp>
       <p:sp>
         <p:nvSpPr>
-          <p:cNvPr id="15" name="TextBox 14"/>
+          <p:cNvPr id="16" name="TextBox 15"/>
           <p:cNvSpPr txBox="1"/>
           <p:nvPr/>
         </p:nvSpPr>
         <p:spPr>
           <a:xfrm>
-            <a:off x="6347307" y="2377440"/>
+            <a:off x="6347307" y="2560320"/>
             <a:ext cx="2282113" cy="640080"/>
           </a:xfrm>
           <a:prstGeom prst="rect">
@@ -4738,7 +4904,7 @@
             <a:r>
               <a:rPr sz="1600" b="1" i="0">
                 <a:solidFill>
-                  <a:srgbClr val="526728"/>
+                  <a:srgbClr val="3E4927"/>
                 </a:solidFill>
               </a:rPr>
               <a:t>돈 · 부</a:t>
@@ -4748,14 +4914,14 @@
       </p:sp>
       <p:sp>
         <p:nvSpPr>
-          <p:cNvPr id="16" name="TextBox 15"/>
+          <p:cNvPr id="17" name="TextBox 16"/>
           <p:cNvSpPr txBox="1"/>
           <p:nvPr/>
         </p:nvSpPr>
         <p:spPr>
           <a:xfrm>
-            <a:off x="6347307" y="3063240"/>
-            <a:ext cx="2282113" cy="3200400"/>
+            <a:off x="6347307" y="3246120"/>
+            <a:ext cx="2282113" cy="2971800"/>
           </a:xfrm>
           <a:prstGeom prst="rect">
             <a:avLst/>
@@ -4776,7 +4942,7 @@
             <a:r>
               <a:rPr sz="1400" b="0" i="0">
                 <a:solidFill>
-                  <a:srgbClr val="2B2B2B"/>
+                  <a:srgbClr val="26231F"/>
                 </a:solidFill>
               </a:rPr>
               <a:t>넉넉한 삶을 바라는 마음</a:t>
@@ -4786,27 +4952,25 @@
       </p:sp>
       <p:sp>
         <p:nvSpPr>
-          <p:cNvPr id="17" name="카드 4"/>
+          <p:cNvPr id="18" name="카드 4"/>
           <p:cNvSpPr/>
           <p:nvPr/>
         </p:nvSpPr>
         <p:spPr>
           <a:xfrm>
-            <a:off x="8995181" y="1600200"/>
-            <a:ext cx="2556433" cy="4800600"/>
+            <a:off x="8995181" y="1783080"/>
+            <a:ext cx="2556433" cy="4572000"/>
           </a:xfrm>
           <a:prstGeom prst="roundRect">
             <a:avLst>
-              <a:gd name="adj" fmla="val 8000"/>
+              <a:gd name="adj" fmla="val 7000"/>
             </a:avLst>
           </a:prstGeom>
           <a:solidFill>
-            <a:srgbClr val="F9FCF3"/>
+            <a:srgbClr val="F7FDEA"/>
           </a:solidFill>
-          <a:ln w="15875">
-            <a:solidFill>
-              <a:srgbClr val="EBF7D4"/>
-            </a:solidFill>
+          <a:ln>
+            <a:noFill/>
           </a:ln>
         </p:spPr>
         <p:txBody>
@@ -4819,23 +4983,23 @@
       </p:sp>
       <p:sp>
         <p:nvSpPr>
-          <p:cNvPr id="18" name="번호 4"/>
+          <p:cNvPr id="19" name="번호 4"/>
           <p:cNvSpPr/>
           <p:nvPr/>
         </p:nvSpPr>
         <p:spPr>
           <a:xfrm>
-            <a:off x="9178061" y="1783080"/>
+            <a:off x="9178061" y="1965960"/>
             <a:ext cx="457200" cy="457200"/>
           </a:xfrm>
           <a:prstGeom prst="ellipse">
             <a:avLst/>
           </a:prstGeom>
-          <a:solidFill>
-            <a:srgbClr val="9DBF5A"/>
-          </a:solidFill>
-          <a:ln>
-            <a:noFill/>
+          <a:noFill/>
+          <a:ln w="19050">
+            <a:solidFill>
+              <a:srgbClr val="D0ED97"/>
+            </a:solidFill>
           </a:ln>
         </p:spPr>
         <p:txBody>
@@ -4852,7 +5016,7 @@
             <a:r>
               <a:rPr sz="1600" b="1" i="0">
                 <a:solidFill>
-                  <a:srgbClr val="FFFFFF"/>
+                  <a:srgbClr val="3E4927"/>
                 </a:solidFill>
               </a:rPr>
               <a:t>4</a:t>
@@ -4862,13 +5026,13 @@
       </p:sp>
       <p:sp>
         <p:nvSpPr>
-          <p:cNvPr id="19" name="TextBox 18"/>
+          <p:cNvPr id="20" name="TextBox 19"/>
           <p:cNvSpPr txBox="1"/>
           <p:nvPr/>
         </p:nvSpPr>
         <p:spPr>
           <a:xfrm>
-            <a:off x="9132341" y="2377440"/>
+            <a:off x="9132341" y="2560320"/>
             <a:ext cx="2282113" cy="640080"/>
           </a:xfrm>
           <a:prstGeom prst="rect">
@@ -4890,7 +5054,7 @@
             <a:r>
               <a:rPr sz="1600" b="1" i="0">
                 <a:solidFill>
-                  <a:srgbClr val="526728"/>
+                  <a:srgbClr val="3E4927"/>
                 </a:solidFill>
               </a:rPr>
               <a:t>마이크 · 인기</a:t>
@@ -4900,14 +5064,14 @@
       </p:sp>
       <p:sp>
         <p:nvSpPr>
-          <p:cNvPr id="20" name="TextBox 19"/>
+          <p:cNvPr id="21" name="TextBox 20"/>
           <p:cNvSpPr txBox="1"/>
           <p:nvPr/>
         </p:nvSpPr>
         <p:spPr>
           <a:xfrm>
-            <a:off x="9132341" y="3063240"/>
-            <a:ext cx="2282113" cy="3200400"/>
+            <a:off x="9132341" y="3246120"/>
+            <a:ext cx="2282113" cy="2971800"/>
           </a:xfrm>
           <a:prstGeom prst="rect">
             <a:avLst/>
@@ -4928,7 +5092,7 @@
             <a:r>
               <a:rPr sz="1400" b="0" i="0">
                 <a:solidFill>
-                  <a:srgbClr val="2B2B2B"/>
+                  <a:srgbClr val="26231F"/>
                 </a:solidFill>
               </a:rPr>
               <a:t>사람들에게 사랑받기를</a:t>
@@ -4950,7 +5114,7 @@
     <p:bg>
       <p:bgPr>
         <a:solidFill>
-          <a:srgbClr val="F9FCF3"/>
+          <a:srgbClr val="FCFDFA"/>
         </a:solidFill>
         <a:effectLst/>
       </p:bgPr>
@@ -4970,14 +5134,16 @@
         </p:nvSpPr>
         <p:spPr>
           <a:xfrm>
-            <a:off x="0" y="6035040"/>
-            <a:ext cx="1737360" cy="822960"/>
-          </a:xfrm>
-          <a:prstGeom prst="rtTriangle">
-            <a:avLst/>
+            <a:off x="640080" y="566928"/>
+            <a:ext cx="64008" cy="868680"/>
+          </a:xfrm>
+          <a:prstGeom prst="roundRect">
+            <a:avLst>
+              <a:gd name="adj" fmla="val 50000"/>
+            </a:avLst>
           </a:prstGeom>
           <a:solidFill>
-            <a:srgbClr val="EBF7D4"/>
+            <a:srgbClr val="D0ED97"/>
           </a:solidFill>
           <a:ln>
             <a:noFill/>
@@ -4993,20 +5159,58 @@
       </p:sp>
       <p:sp>
         <p:nvSpPr>
-          <p:cNvPr id="4" name="장식"/>
+          <p:cNvPr id="4" name="상단 라벨"/>
+          <p:cNvSpPr txBox="1"/>
+          <p:nvPr/>
+        </p:nvSpPr>
+        <p:spPr>
+          <a:xfrm>
+            <a:off x="868680" y="274320"/>
+            <a:ext cx="5486400" cy="274320"/>
+          </a:xfrm>
+          <a:prstGeom prst="rect">
+            <a:avLst/>
+          </a:prstGeom>
+          <a:noFill/>
+        </p:spPr>
+        <p:txBody>
+          <a:bodyPr wrap="square" lIns="54864" rIns="54864" tIns="27432" bIns="27432" anchor="ctr">
+            <a:noAutofit/>
+          </a:bodyPr>
+          <a:lstStyle/>
+          <a:p>
+            <a:pPr algn="l">
+              <a:lnSpc>
+                <a:spcPct val="115000"/>
+              </a:lnSpc>
+            </a:pPr>
+            <a:r>
+              <a:rPr sz="900" b="1" i="0" spc="250">
+                <a:solidFill>
+                  <a:srgbClr val="8E8780"/>
+                </a:solidFill>
+              </a:rPr>
+              <a:t>FIRST BIRTHDAY</a:t>
+            </a:r>
+          </a:p>
+        </p:txBody>
+      </p:sp>
+      <p:sp>
+        <p:nvSpPr>
+          <p:cNvPr id="5" name="포인트"/>
           <p:cNvSpPr/>
           <p:nvPr/>
         </p:nvSpPr>
         <p:spPr>
-          <a:xfrm>
-            <a:off x="0" y="6400800"/>
-            <a:ext cx="914400" cy="457200"/>
-          </a:xfrm>
-          <a:prstGeom prst="rtTriangle">
+          <a:xfrm rot="18900000">
+            <a:off x="11167567" y="667512"/>
+            <a:ext cx="310896" cy="310896"/>
+          </a:xfrm>
+          <a:prstGeom prst="teardrop">
             <a:avLst/>
           </a:prstGeom>
           <a:solidFill>
-            <a:srgbClr val="9DBF5A"/>
+            <a:srgbClr val="D9F2A6"/>
           </a:solidFill>
           <a:ln>
             <a:noFill/>
@@ -5032,8 +5236,8 @@
         </p:nvSpPr>
         <p:spPr>
           <a:xfrm>
-            <a:off x="640080" y="457200"/>
-            <a:ext cx="9722815" cy="868680"/>
+            <a:off x="868680" y="566928"/>
+            <a:ext cx="9448495" cy="868680"/>
           </a:xfrm>
         </p:spPr>
         <p:txBody>
@@ -5050,7 +5254,7 @@
             <a:r>
               <a:rPr sz="3000" b="1" i="0">
                 <a:solidFill>
-                  <a:srgbClr val="526728"/>
+                  <a:srgbClr val="26231F"/>
                 </a:solidFill>
               </a:rPr>
               <a:t>우리 아기의 선택은?</a:t>
@@ -5060,14 +5264,14 @@
       </p:sp>
       <p:sp>
         <p:nvSpPr>
-          <p:cNvPr id="5" name="사진 자리"/>
+          <p:cNvPr id="6" name="사진 자리"/>
           <p:cNvSpPr/>
           <p:nvPr/>
         </p:nvSpPr>
         <p:spPr>
           <a:xfrm>
-            <a:off x="640080" y="1600200"/>
-            <a:ext cx="4572000" cy="4800600"/>
+            <a:off x="640080" y="1783080"/>
+            <a:ext cx="4572000" cy="4572000"/>
           </a:xfrm>
           <a:prstGeom prst="roundRect">
             <a:avLst>
@@ -5075,12 +5279,10 @@
             </a:avLst>
           </a:prstGeom>
           <a:solidFill>
-            <a:srgbClr val="EBF7D4"/>
+            <a:srgbClr val="ECFAD1"/>
           </a:solidFill>
           <a:ln w="19050">
-            <a:solidFill>
-              <a:srgbClr val="9DBF5A"/>
-            </a:solidFill>
+            <a:noFill/>
             <a:prstDash val="dash"/>
           </a:ln>
         </p:spPr>
@@ -5098,7 +5300,7 @@
             <a:r>
               <a:rPr sz="1400" b="0" i="0">
                 <a:solidFill>
-                  <a:srgbClr val="526728"/>
+                  <a:srgbClr val="8E8780"/>
                 </a:solidFill>
               </a:rPr>
               <a:t>돌잡이 사진</a:t>
@@ -5108,27 +5310,25 @@
       </p:sp>
       <p:sp>
         <p:nvSpPr>
-          <p:cNvPr id="6" name="선택 칸"/>
+          <p:cNvPr id="7" name="선택 칸"/>
           <p:cNvSpPr/>
           <p:nvPr/>
         </p:nvSpPr>
         <p:spPr>
           <a:xfrm>
-            <a:off x="5577840" y="1600200"/>
-            <a:ext cx="5973775" cy="4800600"/>
+            <a:off x="5577840" y="1783080"/>
+            <a:ext cx="5973775" cy="4572000"/>
           </a:xfrm>
           <a:prstGeom prst="roundRect">
             <a:avLst>
-              <a:gd name="adj" fmla="val 8000"/>
+              <a:gd name="adj" fmla="val 7000"/>
             </a:avLst>
           </a:prstGeom>
           <a:solidFill>
-            <a:srgbClr val="F9FCF3"/>
+            <a:srgbClr val="F7FDEA"/>
           </a:solidFill>
-          <a:ln w="12700">
-            <a:solidFill>
-              <a:srgbClr val="EBF7D4"/>
-            </a:solidFill>
+          <a:ln>
+            <a:noFill/>
           </a:ln>
         </p:spPr>
         <p:txBody>
@@ -5141,14 +5341,14 @@
       </p:sp>
       <p:sp>
         <p:nvSpPr>
-          <p:cNvPr id="7" name="TextBox 6"/>
+          <p:cNvPr id="8" name="TextBox 7"/>
           <p:cNvSpPr txBox="1"/>
           <p:nvPr/>
         </p:nvSpPr>
         <p:spPr>
           <a:xfrm>
-            <a:off x="5852160" y="1874519"/>
-            <a:ext cx="5425135" cy="4251960"/>
+            <a:off x="5852160" y="2057400"/>
+            <a:ext cx="5425135" cy="4023360"/>
           </a:xfrm>
           <a:prstGeom prst="rect">
             <a:avLst/>
@@ -5169,7 +5369,7 @@
             <a:r>
               <a:rPr sz="1800" b="0" i="0">
                 <a:solidFill>
-                  <a:srgbClr val="2B2B2B"/>
+                  <a:srgbClr val="26231F"/>
                 </a:solidFill>
               </a:rPr>
               <a:t>우리 아기의 선택</a:t>
@@ -5184,7 +5384,7 @@
             <a:r>
               <a:rPr sz="1800" b="0" i="0">
                 <a:solidFill>
-                  <a:srgbClr val="2B2B2B"/>
+                  <a:srgbClr val="26231F"/>
                 </a:solidFill>
               </a:rPr>
               <a:t/>
@@ -5199,7 +5399,7 @@
             <a:r>
               <a:rPr sz="1800" b="0" i="0">
                 <a:solidFill>
-                  <a:srgbClr val="2B2B2B"/>
+                  <a:srgbClr val="26231F"/>
                 </a:solidFill>
               </a:rPr>
               <a:t>무엇을 집었나요?</a:t>
@@ -5214,7 +5414,7 @@
             <a:r>
               <a:rPr sz="1800" b="0" i="0">
                 <a:solidFill>
-                  <a:srgbClr val="2B2B2B"/>
+                  <a:srgbClr val="26231F"/>
                 </a:solidFill>
               </a:rPr>
               <a:t/>
@@ -5229,7 +5429,7 @@
             <a:r>
               <a:rPr sz="1800" b="0" i="0">
                 <a:solidFill>
-                  <a:srgbClr val="2B2B2B"/>
+                  <a:srgbClr val="26231F"/>
                 </a:solidFill>
               </a:rPr>
               <a:t>그때 가족의 반응은?</a:t>
@@ -5251,7 +5451,7 @@
     <p:bg>
       <p:bgPr>
         <a:solidFill>
-          <a:srgbClr val="F9FCF3"/>
+          <a:srgbClr val="FCFDFA"/>
         </a:solidFill>
         <a:effectLst/>
       </p:bgPr>
@@ -5271,14 +5471,16 @@
         </p:nvSpPr>
         <p:spPr>
           <a:xfrm>
-            <a:off x="0" y="6035040"/>
-            <a:ext cx="1737360" cy="822960"/>
-          </a:xfrm>
-          <a:prstGeom prst="rtTriangle">
-            <a:avLst/>
+            <a:off x="640080" y="566928"/>
+            <a:ext cx="64008" cy="868680"/>
+          </a:xfrm>
+          <a:prstGeom prst="roundRect">
+            <a:avLst>
+              <a:gd name="adj" fmla="val 50000"/>
+            </a:avLst>
           </a:prstGeom>
           <a:solidFill>
-            <a:srgbClr val="EBF7D4"/>
+            <a:srgbClr val="D0ED97"/>
           </a:solidFill>
           <a:ln>
             <a:noFill/>
@@ -5294,20 +5496,58 @@
       </p:sp>
       <p:sp>
         <p:nvSpPr>
-          <p:cNvPr id="4" name="장식"/>
+          <p:cNvPr id="4" name="상단 라벨"/>
+          <p:cNvSpPr txBox="1"/>
+          <p:nvPr/>
+        </p:nvSpPr>
+        <p:spPr>
+          <a:xfrm>
+            <a:off x="868680" y="274320"/>
+            <a:ext cx="5486400" cy="274320"/>
+          </a:xfrm>
+          <a:prstGeom prst="rect">
+            <a:avLst/>
+          </a:prstGeom>
+          <a:noFill/>
+        </p:spPr>
+        <p:txBody>
+          <a:bodyPr wrap="square" lIns="54864" rIns="54864" tIns="27432" bIns="27432" anchor="ctr">
+            <a:noAutofit/>
+          </a:bodyPr>
+          <a:lstStyle/>
+          <a:p>
+            <a:pPr algn="l">
+              <a:lnSpc>
+                <a:spcPct val="115000"/>
+              </a:lnSpc>
+            </a:pPr>
+            <a:r>
+              <a:rPr sz="900" b="1" i="0" spc="250">
+                <a:solidFill>
+                  <a:srgbClr val="8E8780"/>
+                </a:solidFill>
+              </a:rPr>
+              <a:t>FIRST BIRTHDAY</a:t>
+            </a:r>
+          </a:p>
+        </p:txBody>
+      </p:sp>
+      <p:sp>
+        <p:nvSpPr>
+          <p:cNvPr id="5" name="포인트"/>
           <p:cNvSpPr/>
           <p:nvPr/>
         </p:nvSpPr>
         <p:spPr>
-          <a:xfrm>
-            <a:off x="0" y="6400800"/>
-            <a:ext cx="914400" cy="457200"/>
-          </a:xfrm>
-          <a:prstGeom prst="rtTriangle">
+          <a:xfrm rot="18900000">
+            <a:off x="11167567" y="667512"/>
+            <a:ext cx="310896" cy="310896"/>
+          </a:xfrm>
+          <a:prstGeom prst="teardrop">
             <a:avLst/>
           </a:prstGeom>
           <a:solidFill>
-            <a:srgbClr val="9DBF5A"/>
+            <a:srgbClr val="D9F2A6"/>
           </a:solidFill>
           <a:ln>
             <a:noFill/>
@@ -5333,8 +5573,8 @@
         </p:nvSpPr>
         <p:spPr>
           <a:xfrm>
-            <a:off x="640080" y="457200"/>
-            <a:ext cx="9722815" cy="868680"/>
+            <a:off x="868680" y="566928"/>
+            <a:ext cx="9448495" cy="868680"/>
           </a:xfrm>
         </p:spPr>
         <p:txBody>
@@ -5351,7 +5591,7 @@
             <a:r>
               <a:rPr sz="3000" b="1" i="0">
                 <a:solidFill>
-                  <a:srgbClr val="526728"/>
+                  <a:srgbClr val="26231F"/>
                 </a:solidFill>
               </a:rPr>
               <a:t>사진 모음</a:t>
@@ -5361,14 +5601,14 @@
       </p:sp>
       <p:sp>
         <p:nvSpPr>
-          <p:cNvPr id="5" name="사진 자리"/>
+          <p:cNvPr id="6" name="사진 자리"/>
           <p:cNvSpPr/>
           <p:nvPr/>
         </p:nvSpPr>
         <p:spPr>
           <a:xfrm>
-            <a:off x="640080" y="1600200"/>
-            <a:ext cx="2590723" cy="2308860"/>
+            <a:off x="640080" y="1783080"/>
+            <a:ext cx="2590723" cy="2194560"/>
           </a:xfrm>
           <a:prstGeom prst="roundRect">
             <a:avLst>
@@ -5376,12 +5616,10 @@
             </a:avLst>
           </a:prstGeom>
           <a:solidFill>
-            <a:srgbClr val="EBF7D4"/>
+            <a:srgbClr val="ECFAD1"/>
           </a:solidFill>
           <a:ln w="19050">
-            <a:solidFill>
-              <a:srgbClr val="9DBF5A"/>
-            </a:solidFill>
+            <a:noFill/>
             <a:prstDash val="dash"/>
           </a:ln>
         </p:spPr>
@@ -5399,7 +5637,7 @@
             <a:r>
               <a:rPr sz="1200" b="0" i="0">
                 <a:solidFill>
-                  <a:srgbClr val="526728"/>
+                  <a:srgbClr val="8E8780"/>
                 </a:solidFill>
               </a:rPr>
               <a:t>사진 1</a:t>
@@ -5409,14 +5647,14 @@
       </p:sp>
       <p:sp>
         <p:nvSpPr>
-          <p:cNvPr id="6" name="사진 자리"/>
+          <p:cNvPr id="7" name="사진 자리"/>
           <p:cNvSpPr/>
           <p:nvPr/>
         </p:nvSpPr>
         <p:spPr>
           <a:xfrm>
-            <a:off x="3413683" y="1600200"/>
-            <a:ext cx="2590723" cy="2308860"/>
+            <a:off x="3413683" y="1783080"/>
+            <a:ext cx="2590723" cy="2194560"/>
           </a:xfrm>
           <a:prstGeom prst="roundRect">
             <a:avLst>
@@ -5424,12 +5662,10 @@
             </a:avLst>
           </a:prstGeom>
           <a:solidFill>
-            <a:srgbClr val="EBF7D4"/>
+            <a:srgbClr val="ECFAD1"/>
           </a:solidFill>
           <a:ln w="19050">
-            <a:solidFill>
-              <a:srgbClr val="9DBF5A"/>
-            </a:solidFill>
+            <a:noFill/>
             <a:prstDash val="dash"/>
           </a:ln>
         </p:spPr>
@@ -5447,7 +5683,7 @@
             <a:r>
               <a:rPr sz="1200" b="0" i="0">
                 <a:solidFill>
-                  <a:srgbClr val="526728"/>
+                  <a:srgbClr val="8E8780"/>
                 </a:solidFill>
               </a:rPr>
               <a:t>사진 2</a:t>
@@ -5457,14 +5693,14 @@
       </p:sp>
       <p:sp>
         <p:nvSpPr>
-          <p:cNvPr id="7" name="사진 자리"/>
+          <p:cNvPr id="8" name="사진 자리"/>
           <p:cNvSpPr/>
           <p:nvPr/>
         </p:nvSpPr>
         <p:spPr>
           <a:xfrm>
-            <a:off x="6187287" y="1600200"/>
-            <a:ext cx="2590723" cy="2308860"/>
+            <a:off x="6187287" y="1783080"/>
+            <a:ext cx="2590723" cy="2194560"/>
           </a:xfrm>
           <a:prstGeom prst="roundRect">
             <a:avLst>
@@ -5472,12 +5708,10 @@
             </a:avLst>
           </a:prstGeom>
           <a:solidFill>
-            <a:srgbClr val="EBF7D4"/>
+            <a:srgbClr val="ECFAD1"/>
           </a:solidFill>
           <a:ln w="19050">
-            <a:solidFill>
-              <a:srgbClr val="9DBF5A"/>
-            </a:solidFill>
+            <a:noFill/>
             <a:prstDash val="dash"/>
           </a:ln>
         </p:spPr>
@@ -5495,7 +5729,7 @@
             <a:r>
               <a:rPr sz="1200" b="0" i="0">
                 <a:solidFill>
-                  <a:srgbClr val="526728"/>
+                  <a:srgbClr val="8E8780"/>
                 </a:solidFill>
               </a:rPr>
               <a:t>사진 3</a:t>
@@ -5505,14 +5739,14 @@
       </p:sp>
       <p:sp>
         <p:nvSpPr>
-          <p:cNvPr id="8" name="사진 자리"/>
+          <p:cNvPr id="9" name="사진 자리"/>
           <p:cNvSpPr/>
           <p:nvPr/>
         </p:nvSpPr>
         <p:spPr>
           <a:xfrm>
-            <a:off x="8960891" y="1600200"/>
-            <a:ext cx="2590723" cy="2308860"/>
+            <a:off x="8960891" y="1783080"/>
+            <a:ext cx="2590723" cy="2194560"/>
           </a:xfrm>
           <a:prstGeom prst="roundRect">
             <a:avLst>
@@ -5520,12 +5754,10 @@
             </a:avLst>
           </a:prstGeom>
           <a:solidFill>
-            <a:srgbClr val="EBF7D4"/>
+            <a:srgbClr val="ECFAD1"/>
           </a:solidFill>
           <a:ln w="19050">
-            <a:solidFill>
-              <a:srgbClr val="9DBF5A"/>
-            </a:solidFill>
+            <a:noFill/>
             <a:prstDash val="dash"/>
           </a:ln>
         </p:spPr>
@@ -5543,7 +5775,7 @@
             <a:r>
               <a:rPr sz="1200" b="0" i="0">
                 <a:solidFill>
-                  <a:srgbClr val="526728"/>
+                  <a:srgbClr val="8E8780"/>
                 </a:solidFill>
               </a:rPr>
               <a:t>사진 4</a:t>
@@ -5553,14 +5785,14 @@
       </p:sp>
       <p:sp>
         <p:nvSpPr>
-          <p:cNvPr id="9" name="사진 자리"/>
+          <p:cNvPr id="10" name="사진 자리"/>
           <p:cNvSpPr/>
           <p:nvPr/>
         </p:nvSpPr>
         <p:spPr>
           <a:xfrm>
-            <a:off x="640080" y="4091939"/>
-            <a:ext cx="2590723" cy="2308860"/>
+            <a:off x="640080" y="4160520"/>
+            <a:ext cx="2590723" cy="2194560"/>
           </a:xfrm>
           <a:prstGeom prst="roundRect">
             <a:avLst>
@@ -5568,12 +5800,10 @@
             </a:avLst>
           </a:prstGeom>
           <a:solidFill>
-            <a:srgbClr val="EBF7D4"/>
+            <a:srgbClr val="ECFAD1"/>
           </a:solidFill>
           <a:ln w="19050">
-            <a:solidFill>
-              <a:srgbClr val="9DBF5A"/>
-            </a:solidFill>
+            <a:noFill/>
             <a:prstDash val="dash"/>
           </a:ln>
         </p:spPr>
@@ -5591,7 +5821,7 @@
             <a:r>
               <a:rPr sz="1200" b="0" i="0">
                 <a:solidFill>
-                  <a:srgbClr val="526728"/>
+                  <a:srgbClr val="8E8780"/>
                 </a:solidFill>
               </a:rPr>
               <a:t>사진 5</a:t>
@@ -5601,14 +5831,14 @@
       </p:sp>
       <p:sp>
         <p:nvSpPr>
-          <p:cNvPr id="10" name="사진 자리"/>
+          <p:cNvPr id="11" name="사진 자리"/>
           <p:cNvSpPr/>
           <p:nvPr/>
         </p:nvSpPr>
         <p:spPr>
           <a:xfrm>
-            <a:off x="3413683" y="4091939"/>
-            <a:ext cx="2590723" cy="2308860"/>
+            <a:off x="3413683" y="4160520"/>
+            <a:ext cx="2590723" cy="2194560"/>
           </a:xfrm>
           <a:prstGeom prst="roundRect">
             <a:avLst>
@@ -5616,12 +5846,10 @@
             </a:avLst>
           </a:prstGeom>
           <a:solidFill>
-            <a:srgbClr val="EBF7D4"/>
+            <a:srgbClr val="ECFAD1"/>
           </a:solidFill>
           <a:ln w="19050">
-            <a:solidFill>
-              <a:srgbClr val="9DBF5A"/>
-            </a:solidFill>
+            <a:noFill/>
             <a:prstDash val="dash"/>
           </a:ln>
         </p:spPr>
@@ -5639,7 +5867,7 @@
             <a:r>
               <a:rPr sz="1200" b="0" i="0">
                 <a:solidFill>
-                  <a:srgbClr val="526728"/>
+                  <a:srgbClr val="8E8780"/>
                 </a:solidFill>
               </a:rPr>
               <a:t>사진 6</a:t>
@@ -5649,14 +5877,14 @@
       </p:sp>
       <p:sp>
         <p:nvSpPr>
-          <p:cNvPr id="11" name="사진 자리"/>
+          <p:cNvPr id="12" name="사진 자리"/>
           <p:cNvSpPr/>
           <p:nvPr/>
         </p:nvSpPr>
         <p:spPr>
           <a:xfrm>
-            <a:off x="6187287" y="4091939"/>
-            <a:ext cx="2590723" cy="2308860"/>
+            <a:off x="6187287" y="4160520"/>
+            <a:ext cx="2590723" cy="2194560"/>
           </a:xfrm>
           <a:prstGeom prst="roundRect">
             <a:avLst>
@@ -5664,12 +5892,10 @@
             </a:avLst>
           </a:prstGeom>
           <a:solidFill>
-            <a:srgbClr val="EBF7D4"/>
+            <a:srgbClr val="ECFAD1"/>
           </a:solidFill>
           <a:ln w="19050">
-            <a:solidFill>
-              <a:srgbClr val="9DBF5A"/>
-            </a:solidFill>
+            <a:noFill/>
             <a:prstDash val="dash"/>
           </a:ln>
         </p:spPr>
@@ -5687,7 +5913,7 @@
             <a:r>
               <a:rPr sz="1200" b="0" i="0">
                 <a:solidFill>
-                  <a:srgbClr val="526728"/>
+                  <a:srgbClr val="8E8780"/>
                 </a:solidFill>
               </a:rPr>
               <a:t>사진 7</a:t>
@@ -5697,14 +5923,14 @@
       </p:sp>
       <p:sp>
         <p:nvSpPr>
-          <p:cNvPr id="12" name="사진 자리"/>
+          <p:cNvPr id="13" name="사진 자리"/>
           <p:cNvSpPr/>
           <p:nvPr/>
         </p:nvSpPr>
         <p:spPr>
           <a:xfrm>
-            <a:off x="8960891" y="4091939"/>
-            <a:ext cx="2590723" cy="2308860"/>
+            <a:off x="8960891" y="4160520"/>
+            <a:ext cx="2590723" cy="2194560"/>
           </a:xfrm>
           <a:prstGeom prst="roundRect">
             <a:avLst>
@@ -5712,12 +5938,10 @@
             </a:avLst>
           </a:prstGeom>
           <a:solidFill>
-            <a:srgbClr val="EBF7D4"/>
+            <a:srgbClr val="ECFAD1"/>
           </a:solidFill>
           <a:ln w="19050">
-            <a:solidFill>
-              <a:srgbClr val="9DBF5A"/>
-            </a:solidFill>
+            <a:noFill/>
             <a:prstDash val="dash"/>
           </a:ln>
         </p:spPr>
@@ -5735,7 +5959,7 @@
             <a:r>
               <a:rPr sz="1200" b="0" i="0">
                 <a:solidFill>
-                  <a:srgbClr val="526728"/>
+                  <a:srgbClr val="8E8780"/>
                 </a:solidFill>
               </a:rPr>
               <a:t>사진 8</a:t>
@@ -5754,6 +5978,14 @@
 <file path=ppt/slides/slide6.xml><?xml version="1.0" encoding="utf-8"?>
 <p:sld xmlns:a="http://schemas.openxmlformats.org/drawingml/2006/main" xmlns:p="http://schemas.openxmlformats.org/presentationml/2006/main" xmlns:r="http://schemas.openxmlformats.org/officeDocument/2006/relationships">
   <p:cSld>
+    <p:bg>
+      <p:bgPr>
+        <a:solidFill>
+          <a:srgbClr val="F7FDEA"/>
+        </a:solidFill>
+        <a:effectLst/>
+      </p:bgPr>
+    </p:bg>
     <p:spTree>
       <p:nvGrpSpPr>
         <p:cNvPr id="1" name=""/>
@@ -5761,30 +5993,116 @@
         <p:nvPr/>
       </p:nvGrpSpPr>
       <p:grpSpPr/>
-      <p:pic>
-        <p:nvPicPr>
-          <p:cNvPr id="3" name="표지 그림" descr="birthday-12.jpg"/>
-          <p:cNvPicPr>
-            <a:picLocks noChangeAspect="1"/>
-          </p:cNvPicPr>
+      <p:sp>
+        <p:nvSpPr>
+          <p:cNvPr id="3" name="사진 자리"/>
+          <p:cNvSpPr/>
           <p:nvPr/>
-        </p:nvPicPr>
-        <p:blipFill>
-          <a:blip r:embed="rId2"/>
-          <a:stretch>
-            <a:fillRect/>
-          </a:stretch>
-        </p:blipFill>
-        <p:spPr>
-          <a:xfrm>
-            <a:off x="0" y="0"/>
-            <a:ext cx="12191695" cy="6858000"/>
+        </p:nvSpPr>
+        <p:spPr>
+          <a:xfrm>
+            <a:off x="7802684" y="0"/>
+            <a:ext cx="4389010" cy="6858000"/>
           </a:xfrm>
           <a:prstGeom prst="rect">
             <a:avLst/>
           </a:prstGeom>
-        </p:spPr>
-      </p:pic>
+          <a:solidFill>
+            <a:srgbClr val="D9F2A6"/>
+          </a:solidFill>
+          <a:ln>
+            <a:noFill/>
+          </a:ln>
+        </p:spPr>
+        <p:txBody>
+          <a:bodyPr rtlCol="0" anchor="ctr" wrap="square" lIns="54864" rIns="54864" tIns="27432" bIns="27432">
+            <a:noAutofit/>
+          </a:bodyPr>
+          <a:lstStyle/>
+          <a:p>
+            <a:pPr algn="ctr">
+              <a:lnSpc>
+                <a:spcPct val="100000"/>
+              </a:lnSpc>
+            </a:pPr>
+            <a:r>
+              <a:rPr sz="1400" b="0" i="0">
+                <a:solidFill>
+                  <a:srgbClr val="3E4927"/>
+                </a:solidFill>
+              </a:rPr>
+              <a:t>사진을 넣어 주세요</a:t>
+            </a:r>
+          </a:p>
+        </p:txBody>
+      </p:sp>
+      <p:sp>
+        <p:nvSpPr>
+          <p:cNvPr id="4" name="장식"/>
+          <p:cNvSpPr/>
+          <p:nvPr/>
+        </p:nvSpPr>
+        <p:spPr>
+          <a:xfrm>
+            <a:off x="8168435" y="365760"/>
+            <a:ext cx="3657508" cy="6126480"/>
+          </a:xfrm>
+          <a:prstGeom prst="rect">
+            <a:avLst/>
+          </a:prstGeom>
+          <a:noFill/>
+          <a:ln w="9525">
+            <a:solidFill>
+              <a:srgbClr val="26231F"/>
+            </a:solidFill>
+          </a:ln>
+        </p:spPr>
+        <p:txBody>
+          <a:bodyPr rtlCol="0" anchor="ctr"/>
+          <a:lstStyle/>
+          <a:p>
+            <a:pPr algn="ctr"/>
+          </a:p>
+        </p:txBody>
+      </p:sp>
+      <p:sp>
+        <p:nvSpPr>
+          <p:cNvPr id="5" name="라벨"/>
+          <p:cNvSpPr txBox="1"/>
+          <p:nvPr/>
+        </p:nvSpPr>
+        <p:spPr>
+          <a:xfrm>
+            <a:off x="822960" y="2148840"/>
+            <a:ext cx="5608179" cy="274320"/>
+          </a:xfrm>
+          <a:prstGeom prst="rect">
+            <a:avLst/>
+          </a:prstGeom>
+          <a:noFill/>
+        </p:spPr>
+        <p:txBody>
+          <a:bodyPr wrap="square" lIns="54864" rIns="54864" tIns="27432" bIns="27432" anchor="t">
+            <a:noAutofit/>
+          </a:bodyPr>
+          <a:lstStyle/>
+          <a:p>
+            <a:pPr algn="l">
+              <a:lnSpc>
+                <a:spcPct val="115000"/>
+              </a:lnSpc>
+            </a:pPr>
+            <a:r>
+              <a:rPr sz="1000" b="1" i="0" spc="250">
+                <a:solidFill>
+                  <a:srgbClr val="26231F"/>
+                </a:solidFill>
+              </a:rPr>
+              <a:t>FIRST BIRTHDAY</a:t>
+            </a:r>
+          </a:p>
+        </p:txBody>
+      </p:sp>
       <p:sp>
         <p:nvSpPr>
           <p:cNvPr id="2" name="Title 1"/>
@@ -5797,8 +6115,8 @@
         </p:nvSpPr>
         <p:spPr>
           <a:xfrm>
-            <a:off x="853418" y="2057400"/>
-            <a:ext cx="6095847" cy="1554480"/>
+            <a:off x="822960" y="2606040"/>
+            <a:ext cx="5608179" cy="1188720"/>
           </a:xfrm>
         </p:spPr>
         <p:txBody>
@@ -5815,7 +6133,7 @@
             <a:r>
               <a:rPr sz="3400" b="1" i="0">
                 <a:solidFill>
-                  <a:srgbClr val="526728"/>
+                  <a:srgbClr val="26231F"/>
                 </a:solidFill>
               </a:rPr>
               <a:t>와 주셔서 고맙습니다</a:t>
@@ -5825,14 +6143,14 @@
       </p:sp>
       <p:sp>
         <p:nvSpPr>
-          <p:cNvPr id="4" name="한 줄 문구"/>
+          <p:cNvPr id="6" name="한 줄 문구"/>
           <p:cNvSpPr txBox="1"/>
           <p:nvPr/>
         </p:nvSpPr>
         <p:spPr>
           <a:xfrm>
-            <a:off x="853418" y="3749039"/>
-            <a:ext cx="6095847" cy="822960"/>
+            <a:off x="822960" y="3886200"/>
+            <a:ext cx="5608179" cy="822960"/>
           </a:xfrm>
           <a:prstGeom prst="rect">
             <a:avLst/>
@@ -5851,9 +6169,9 @@
               </a:lnSpc>
             </a:pPr>
             <a:r>
-              <a:rPr sz="1700" b="0" i="1">
-                <a:solidFill>
-                  <a:srgbClr val="526728"/>
+              <a:rPr sz="1700" b="0" i="0">
+                <a:solidFill>
+                  <a:srgbClr val="26231F"/>
                 </a:solidFill>
               </a:rPr>
               <a:t>아이가 한 살이 되었습니다</a:t>
@@ -5863,14 +6181,14 @@
       </p:sp>
       <p:sp>
         <p:nvSpPr>
-          <p:cNvPr id="5" name="안내 문구"/>
+          <p:cNvPr id="7" name="안내 문구"/>
           <p:cNvSpPr txBox="1"/>
           <p:nvPr/>
         </p:nvSpPr>
         <p:spPr>
           <a:xfrm>
-            <a:off x="853418" y="4617720"/>
-            <a:ext cx="6095847" cy="914400"/>
+            <a:off x="822960" y="4754880"/>
+            <a:ext cx="5608179" cy="914400"/>
           </a:xfrm>
           <a:prstGeom prst="rect">
             <a:avLst/>
@@ -5891,7 +6209,7 @@
             <a:r>
               <a:rPr sz="1400" b="0" i="0">
                 <a:solidFill>
-                  <a:srgbClr val="666666"/>
+                  <a:srgbClr val="26231F"/>
                 </a:solidFill>
               </a:rPr>
               <a:t>아기 이름 · 부모 이름</a:t>
@@ -5918,34 +6236,34 @@
         <a:sysClr val="window" lastClr="FFFFFF"/>
       </a:lt1>
       <a:dk2>
-        <a:srgbClr val="526728"/>
+        <a:srgbClr val="3E4927"/>
       </a:dk2>
       <a:lt2>
-        <a:srgbClr val="F9FCF3"/>
+        <a:srgbClr val="F7FDEA"/>
       </a:lt2>
       <a:accent1>
-        <a:srgbClr val="9DBF5A"/>
+        <a:srgbClr val="D0ED97"/>
       </a:accent1>
       <a:accent2>
-        <a:srgbClr val="339941"/>
+        <a:srgbClr val="C5F3BA"/>
       </a:accent2>
       <a:accent3>
-        <a:srgbClr val="526728"/>
+        <a:srgbClr val="3E4927"/>
       </a:accent3>
       <a:accent4>
-        <a:srgbClr val="EBF7D4"/>
+        <a:srgbClr val="ECFAD1"/>
       </a:accent4>
       <a:accent5>
-        <a:srgbClr val="68AC4E"/>
+        <a:srgbClr val="CAF0A8"/>
       </a:accent5>
       <a:accent6>
-        <a:srgbClr val="97A47E"/>
+        <a:srgbClr val="8B927D"/>
       </a:accent6>
       <a:hlink>
-        <a:srgbClr val="9DBF5A"/>
+        <a:srgbClr val="D0ED97"/>
       </a:hlink>
       <a:folHlink>
-        <a:srgbClr val="526728"/>
+        <a:srgbClr val="3E4927"/>
       </a:folHlink>
     </a:clrScheme>
     <a:fontScheme name="Office">
